--- a/python/CourseDesign/Week06e/Week6_Lecture11_Downsampling_Decimation_CNN_Strides.pptx
+++ b/python/CourseDesign/Week06e/Week6_Lecture11_Downsampling_Decimation_CNN_Strides.pptx
@@ -4,6 +4,9 @@
   <p:sldMasterIdLst>
     <p:sldMasterId id="2147483648" r:id="rId1"/>
   </p:sldMasterIdLst>
+  <p:notesMasterIdLst>
+    <p:notesMasterId r:id="rId21"/>
+  </p:notesMasterIdLst>
   <p:sldIdLst>
     <p:sldId id="256" r:id="rId2"/>
     <p:sldId id="257" r:id="rId3"/>
@@ -25,9 +28,6 @@
     <p:sldId id="273" r:id="rId19"/>
     <p:sldId id="274" r:id="rId20"/>
   </p:sldIdLst>
-  <p:notesMasterIdLst>
-    <p:notesMasterId r:id="rId21"/>
-  </p:notesMasterIdLst>
   <p:sldSz cx="12192000" cy="6858000"/>
   <p:notesSz cx="6858000" cy="12192000"/>
   <p:defaultTextStyle>
@@ -122,6 +122,11 @@
       </a:defRPr>
     </a:lvl9pPr>
   </p:defaultTextStyle>
+  <p:extLst>
+    <p:ext uri="{EFAFB233-063F-42B5-8137-9DF3F51BA10A}">
+      <p15:sldGuideLst xmlns:p15="http://schemas.microsoft.com/office/powerpoint/2012/main"/>
+    </p:ext>
+  </p:extLst>
 </p:presentation>
 </file>
 
@@ -147,234 +152,10 @@
           <a:chExt cx="0" cy="0"/>
         </a:xfrm>
       </p:grpSpPr>
-      <p:sp>
-        <p:nvSpPr>
-          <p:cNvPr id="2" name="Header Placeholder 1"/>
-          <p:cNvSpPr>
-            <a:spLocks noGrp="1"/>
-          </p:cNvSpPr>
-          <p:nvPr>
-            <p:ph type="hdr" sz="quarter"/>
-          </p:nvPr>
-        </p:nvSpPr>
-        <p:spPr>
-          <a:xfrm>
-            <a:off x="0" y="0"/>
-            <a:ext cx="2971800" cy="458788"/>
-          </a:xfrm>
-          <a:prstGeom prst="rect">
-            <a:avLst/>
-          </a:prstGeom>
-        </p:spPr>
-        <p:txBody>
-          <a:bodyPr vert="horz" lIns="91440" tIns="45720" rIns="91440" bIns="45720" rtlCol="0"/>
-          <a:lstStyle>
-            <a:lvl1pPr algn="l">
-              <a:defRPr sz="1200"/>
-            </a:lvl1pPr>
-          </a:lstStyle>
-          <a:p>
-            <a:endParaRPr lang="en-US"/>
-          </a:p>
-        </p:txBody>
-      </p:sp>
-      <p:sp>
-        <p:nvSpPr>
-          <p:cNvPr id="3" name="Date Placeholder 2"/>
-          <p:cNvSpPr>
-            <a:spLocks noGrp="1"/>
-          </p:cNvSpPr>
-          <p:nvPr>
-            <p:ph type="dt" idx="1"/>
-          </p:nvPr>
-        </p:nvSpPr>
-        <p:spPr>
-          <a:xfrm>
-            <a:off x="3884613" y="0"/>
-            <a:ext cx="2971800" cy="458788"/>
-          </a:xfrm>
-          <a:prstGeom prst="rect">
-            <a:avLst/>
-          </a:prstGeom>
-        </p:spPr>
-        <p:txBody>
-          <a:bodyPr vert="horz" lIns="91440" tIns="45720" rIns="91440" bIns="45720" rtlCol="0"/>
-          <a:lstStyle>
-            <a:lvl1pPr algn="r">
-              <a:defRPr sz="1200"/>
-            </a:lvl1pPr>
-          </a:lstStyle>
-          <a:p>
-            <a:fld id="{5282F153-3F37-0F45-9E97-73ACFA13230C}" type="datetimeFigureOut">
-              <a:rPr lang="en-US"/>
-              <a:t>7/23/19</a:t>
-            </a:fld>
-            <a:endParaRPr lang="en-US"/>
-          </a:p>
-        </p:txBody>
-      </p:sp>
-      <p:sp>
-        <p:nvSpPr>
-          <p:cNvPr id="4" name="Slide Image Placeholder 3"/>
-          <p:cNvSpPr>
-            <a:spLocks noGrp="1" noRot="1" noChangeAspect="1"/>
-          </p:cNvSpPr>
-          <p:nvPr>
-            <p:ph type="sldImg" idx="2"/>
-          </p:nvPr>
-        </p:nvSpPr>
-        <p:spPr>
-          <a:xfrm>
-            <a:off x="685800" y="1143000"/>
-            <a:ext cx="5486400" cy="3086100"/>
-          </a:xfrm>
-          <a:prstGeom prst="rect">
-            <a:avLst/>
-          </a:prstGeom>
-          <a:noFill/>
-          <a:ln w="12700">
-            <a:solidFill>
-              <a:prstClr val="black"/>
-            </a:solidFill>
-          </a:ln>
-        </p:spPr>
-        <p:txBody>
-          <a:bodyPr vert="horz" lIns="91440" tIns="45720" rIns="91440" bIns="45720" rtlCol="0" anchor="ctr"/>
-          <a:lstStyle/>
-          <a:p>
-            <a:endParaRPr lang="en-US"/>
-          </a:p>
-        </p:txBody>
-      </p:sp>
-      <p:sp>
-        <p:nvSpPr>
-          <p:cNvPr id="5" name="Notes Placeholder 4"/>
-          <p:cNvSpPr>
-            <a:spLocks noGrp="1"/>
-          </p:cNvSpPr>
-          <p:nvPr>
-            <p:ph type="body" sz="quarter" idx="3"/>
-          </p:nvPr>
-        </p:nvSpPr>
-        <p:spPr>
-          <a:xfrm>
-            <a:off x="685800" y="4400550"/>
-            <a:ext cx="5486400" cy="3600450"/>
-          </a:xfrm>
-          <a:prstGeom prst="rect">
-            <a:avLst/>
-          </a:prstGeom>
-        </p:spPr>
-        <p:txBody>
-          <a:bodyPr vert="horz" lIns="91440" tIns="45720" rIns="91440" bIns="45720" rtlCol="0"/>
-          <a:lstStyle/>
-          <a:p>
-            <a:pPr lvl="0"/>
-            <a:r>
-              <a:rPr lang="en-US"/>
-              <a:t>Click to edit Master text styles</a:t>
-            </a:r>
-          </a:p>
-          <a:p>
-            <a:pPr lvl="1"/>
-            <a:r>
-              <a:rPr lang="en-US"/>
-              <a:t>Second level</a:t>
-            </a:r>
-          </a:p>
-          <a:p>
-            <a:pPr lvl="2"/>
-            <a:r>
-              <a:rPr lang="en-US"/>
-              <a:t>Third level</a:t>
-            </a:r>
-          </a:p>
-          <a:p>
-            <a:pPr lvl="3"/>
-            <a:r>
-              <a:rPr lang="en-US"/>
-              <a:t>Fourth level</a:t>
-            </a:r>
-          </a:p>
-          <a:p>
-            <a:pPr lvl="4"/>
-            <a:r>
-              <a:rPr lang="en-US"/>
-              <a:t>Fifth level</a:t>
-            </a:r>
-          </a:p>
-        </p:txBody>
-      </p:sp>
-      <p:sp>
-        <p:nvSpPr>
-          <p:cNvPr id="6" name="Footer Placeholder 5"/>
-          <p:cNvSpPr>
-            <a:spLocks noGrp="1"/>
-          </p:cNvSpPr>
-          <p:nvPr>
-            <p:ph type="ftr" sz="quarter" idx="4"/>
-          </p:nvPr>
-        </p:nvSpPr>
-        <p:spPr>
-          <a:xfrm>
-            <a:off x="0" y="8685213"/>
-            <a:ext cx="2971800" cy="458787"/>
-          </a:xfrm>
-          <a:prstGeom prst="rect">
-            <a:avLst/>
-          </a:prstGeom>
-        </p:spPr>
-        <p:txBody>
-          <a:bodyPr vert="horz" lIns="91440" tIns="45720" rIns="91440" bIns="45720" rtlCol="0" anchor="b"/>
-          <a:lstStyle>
-            <a:lvl1pPr algn="l">
-              <a:defRPr sz="1200"/>
-            </a:lvl1pPr>
-          </a:lstStyle>
-          <a:p>
-            <a:endParaRPr lang="en-US"/>
-          </a:p>
-        </p:txBody>
-      </p:sp>
-      <p:sp>
-        <p:nvSpPr>
-          <p:cNvPr id="7" name="Slide Number Placeholder 6"/>
-          <p:cNvSpPr>
-            <a:spLocks noGrp="1"/>
-          </p:cNvSpPr>
-          <p:nvPr>
-            <p:ph type="sldNum" sz="quarter" idx="5"/>
-          </p:nvPr>
-        </p:nvSpPr>
-        <p:spPr>
-          <a:xfrm>
-            <a:off x="3884613" y="8685213"/>
-            <a:ext cx="2971800" cy="458787"/>
-          </a:xfrm>
-          <a:prstGeom prst="rect">
-            <a:avLst/>
-          </a:prstGeom>
-        </p:spPr>
-        <p:txBody>
-          <a:bodyPr vert="horz" lIns="91440" tIns="45720" rIns="91440" bIns="45720" rtlCol="0" anchor="b"/>
-          <a:lstStyle>
-            <a:lvl1pPr algn="r">
-              <a:defRPr sz="1200"/>
-            </a:lvl1pPr>
-          </a:lstStyle>
-          <a:p>
-            <a:fld id="{CE5E9CC1-C706-0F49-92D6-E571CC5EEA8F}" type="slidenum">
-              <a:rPr lang="en-US"/>
-              <a:t>‹#›</a:t>
-            </a:fld>
-            <a:endParaRPr lang="en-US"/>
-          </a:p>
-        </p:txBody>
-      </p:sp>
     </p:spTree>
     <p:extLst>
       <p:ext uri="{BB962C8B-B14F-4D97-AF65-F5344CB8AC3E}">
-        <p14:creationId xmlns:p14="http://schemas.microsoft.com/office/powerpoint/2010/main" val="1024086991"/>
+        <p14:creationId xmlns:p14="http://schemas.microsoft.com/office/powerpoint/2010/main" val="1684316488"/>
       </p:ext>
     </p:extLst>
   </p:cSld>
@@ -522,7 +303,6 @@
               <a:rPr lang="en-US" dirty="0"/>
               <a:t>0:00–0:02. Frame the lecture as one idea appearing in two communities: sample-rate reduction in DSP and striding/pooling in CNNs.</a:t>
             </a:r>
-            <a:endParaRPr lang="en-US" dirty="0"/>
           </a:p>
         </p:txBody>
       </p:sp>
@@ -610,7 +390,6 @@
               <a:rPr lang="en-US" dirty="0"/>
               <a:t>Show the difference between “cutoff = π/2” as theory and a realizable response with transition width. Ask where the first aliased energy would land if not removed.</a:t>
             </a:r>
-            <a:endParaRPr lang="en-US" dirty="0"/>
           </a:p>
         </p:txBody>
       </p:sp>
@@ -698,7 +477,6 @@
               <a:rPr lang="en-US" dirty="0"/>
               <a:t>Use the nuance statement to avoid turning “FIR linear phase” into a universal rule. For audio, latency may motivate different choices.</a:t>
             </a:r>
-            <a:endParaRPr lang="en-US" dirty="0"/>
           </a:p>
         </p:txBody>
       </p:sp>
@@ -786,7 +564,6 @@
               <a:rPr lang="en-US" dirty="0"/>
               <a:t>Suggested answer: Need 0.22π ≤ π/M, so M ≤ 1/0.22 ≈ 4.54. Largest integer M is 4.</a:t>
             </a:r>
-            <a:endParaRPr lang="en-US" dirty="0"/>
           </a:p>
         </p:txBody>
       </p:sp>
@@ -874,7 +651,6 @@
               <a:rPr lang="en-US" dirty="0"/>
               <a:t>0:50. This connection is the conceptual bridge to ML.</a:t>
             </a:r>
-            <a:endParaRPr lang="en-US" dirty="0"/>
           </a:p>
         </p:txBody>
       </p:sp>
@@ -962,7 +738,6 @@
               <a:rPr lang="en-US" dirty="0"/>
               <a:t>A Conv1d stride=M can be written as convolution followed by taking every Mth output. That makes the sampling interpretation exact.</a:t>
             </a:r>
-            <a:endParaRPr lang="en-US" dirty="0"/>
           </a:p>
         </p:txBody>
       </p:sp>
@@ -1050,7 +825,6 @@
               <a:rPr lang="en-US" dirty="0"/>
               <a:t>Distinguish exact equivariance from robustness. Striding inherently reduces resolution; aliasing makes phase sensitivity worse.</a:t>
             </a:r>
-            <a:endParaRPr lang="en-US" dirty="0"/>
           </a:p>
         </p:txBody>
       </p:sp>
@@ -1138,7 +912,6 @@
               <a:rPr lang="en-US" dirty="0"/>
               <a:t>Present anti-aliased CNNs as a design pattern, not a magic rule. The right amount of lowpass filtering depends on data, task, and architecture.</a:t>
             </a:r>
-            <a:endParaRPr lang="en-US" dirty="0"/>
           </a:p>
         </p:txBody>
       </p:sp>
@@ -1226,7 +999,6 @@
               <a:rPr lang="en-US" dirty="0"/>
               <a:t>Let pairs predict before running the notebook. The lowpass+stride pipeline should be less sensitive for signals dominated by content near the new Nyquist boundary.</a:t>
             </a:r>
-            <a:endParaRPr lang="en-US" dirty="0"/>
           </a:p>
         </p:txBody>
       </p:sp>
@@ -1314,7 +1086,6 @@
               <a:rPr lang="en-US" dirty="0"/>
               <a:t>Good exit answer: because task loss does not force the kernel to suppress frequencies above the post-stride Nyquist limit, so high-frequency feature energy can alias.</a:t>
             </a:r>
-            <a:endParaRPr lang="en-US" dirty="0"/>
           </a:p>
         </p:txBody>
       </p:sp>
@@ -1402,7 +1173,6 @@
               <a:rPr lang="en-US" dirty="0"/>
               <a:t>Appendix slide for course-site distribution.</a:t>
             </a:r>
-            <a:endParaRPr lang="en-US" dirty="0"/>
           </a:p>
         </p:txBody>
       </p:sp>
@@ -1490,7 +1260,6 @@
               <a:rPr lang="en-US" dirty="0"/>
               <a:t>Ask students to connect to Week 2 sampling/aliasing. Emphasize that the “new” operation is discrete-time rate change, but the sampling logic is familiar.</a:t>
             </a:r>
-            <a:endParaRPr lang="en-US" dirty="0"/>
           </a:p>
         </p:txBody>
       </p:sp>
@@ -1578,7 +1347,6 @@
               <a:rPr lang="en-US" dirty="0"/>
               <a:t>0:02–0:04. Transition into the formal definition.</a:t>
             </a:r>
-            <a:endParaRPr lang="en-US" dirty="0"/>
           </a:p>
         </p:txBody>
       </p:sp>
@@ -1666,7 +1434,6 @@
               <a:rPr lang="en-US" dirty="0"/>
               <a:t>Work M=3 explicitly: x_d[0]=x[0], x_d[1]=x[3], x_d[2]=x[6]. Ask: what happens to the physical time spacing between samples?</a:t>
             </a:r>
-            <a:endParaRPr lang="en-US" dirty="0"/>
           </a:p>
         </p:txBody>
       </p:sp>
@@ -1754,7 +1521,6 @@
               <a:rPr lang="en-US" dirty="0"/>
               <a:t>Have students compute the result before revealing the callout. Common error: students confuse downsampling by M with dividing amplitudes by M.</a:t>
             </a:r>
-            <a:endParaRPr lang="en-US" dirty="0"/>
           </a:p>
         </p:txBody>
       </p:sp>
@@ -1842,7 +1608,6 @@
               <a:rPr lang="en-US" dirty="0"/>
               <a:t>Do not over-derive unless this class needs it. The important mental model is “stretch, shift, add.” Connect overlap directly to aliasing.</a:t>
             </a:r>
-            <a:endParaRPr lang="en-US" dirty="0"/>
           </a:p>
         </p:txBody>
       </p:sp>
@@ -1930,7 +1695,6 @@
               <a:rPr lang="en-US" dirty="0"/>
               <a:t>Ask students to describe the difference between the two figures without equations first. Then connect the safe bandwidth to π/M.</a:t>
             </a:r>
-            <a:endParaRPr lang="en-US" dirty="0"/>
           </a:p>
         </p:txBody>
       </p:sp>
@@ -2018,7 +1782,6 @@
               <a:rPr lang="en-US" dirty="0"/>
               <a:t>0:25. This is the engineering implementation, not just the mathematical operator.</a:t>
             </a:r>
-            <a:endParaRPr lang="en-US" dirty="0"/>
           </a:p>
         </p:txBody>
       </p:sp>
@@ -2106,7 +1869,6 @@
               <a:rPr lang="en-US" dirty="0"/>
               <a:t>Emphasize that ωc = π/M is the idealized boundary. Practical FIR filters need a transition band; the passband must end below π/M.</a:t>
             </a:r>
-            <a:endParaRPr lang="en-US" dirty="0"/>
           </a:p>
         </p:txBody>
       </p:sp>
@@ -2184,6 +1946,7 @@
         <a:solidFill>
           <a:srgbClr val="FFFFFF"/>
         </a:solidFill>
+        <a:effectLst/>
       </p:bgPr>
     </p:bg>
     <p:spTree>
@@ -2246,7 +2009,7 @@
           <a:bodyPr wrap="square" lIns="0" tIns="0" rIns="0" bIns="0" rtlCol="0" anchor="ctr"/>
           <a:lstStyle/>
           <a:p>
-            <a:pPr indent="0" marL="0">
+            <a:pPr marL="0" indent="0">
               <a:buNone/>
             </a:pPr>
             <a:r>
@@ -2285,7 +2048,7 @@
           <a:bodyPr wrap="square" lIns="0" tIns="0" rIns="0" bIns="0" rtlCol="0" anchor="ctr"/>
           <a:lstStyle/>
           <a:p>
-            <a:pPr algn="r" indent="0" marL="0">
+            <a:pPr marL="0" indent="0" algn="r">
               <a:buNone/>
             </a:pPr>
             <a:r>
@@ -2323,7 +2086,7 @@
           </a:prstGeom>
           <a:extLst>
             <a:ext uri="{C572A759-6A51-4108-AA02-DFA0A04FC94B}">
-              <ma14:wrappingTextBoxFlag xmlns:ma14="http://schemas.microsoft.com/office/mac/drawingml/2011/main" val="0"/>
+              <ma14:wrappingTextBoxFlag xmlns:ma14="http://schemas.microsoft.com/office/mac/drawingml/2011/main" xmlns="" val="0"/>
             </a:ext>
           </a:extLst>
         </p:spPr>
@@ -2344,8 +2107,8 @@
           <a:p>
             <a:pPr algn="r"/>
             <a:fld id="{F7021451-1387-4CA6-816F-3879F97B5CBC}" type="slidenum">
-              <a:rPr b="0" lang="en-US"/>
-              <a:t>1002</a:t>
+              <a:rPr lang="en-US" b="0"/>
+              <a:t>‹#›</a:t>
             </a:fld>
             <a:endParaRPr lang="en-US"/>
           </a:p>
@@ -2362,6 +2125,11 @@
 <file path=ppt/slideMasters/slideMaster1.xml><?xml version="1.0" encoding="utf-8"?>
 <p:sldMaster xmlns:a="http://schemas.openxmlformats.org/drawingml/2006/main" xmlns:r="http://schemas.openxmlformats.org/officeDocument/2006/relationships" xmlns:p="http://schemas.openxmlformats.org/presentationml/2006/main">
   <p:cSld>
+    <p:bg>
+      <p:bgRef idx="1001">
+        <a:schemeClr val="bg1"/>
+      </p:bgRef>
+    </p:bg>
     <p:spTree>
       <p:nvGrpSpPr>
         <p:cNvPr id="1" name=""/>
@@ -2396,7 +2164,7 @@
           </a:prstGeom>
           <a:extLst>
             <a:ext uri="{C572A759-6A51-4108-AA02-DFA0A04FC94B}">
-              <ma14:wrappingTextBoxFlag xmlns:ma14="http://schemas.microsoft.com/office/mac/drawingml/2011/main" val="0"/>
+              <ma14:wrappingTextBoxFlag xmlns:ma14="http://schemas.microsoft.com/office/mac/drawingml/2011/main" xmlns="" val="0"/>
             </a:ext>
           </a:extLst>
         </p:spPr>
@@ -2417,8 +2185,8 @@
           <a:p>
             <a:pPr algn="r"/>
             <a:fld id="{F7021451-1387-4CA6-816F-3879F97B5CBC}" type="slidenum">
-              <a:rPr b="0" lang="en-US"/>
-              <a:t>null</a:t>
+              <a:rPr lang="en-US" b="0"/>
+              <a:t>‹#›</a:t>
             </a:fld>
             <a:endParaRPr lang="en-US"/>
           </a:p>
@@ -2693,6 +2461,7 @@
         <a:solidFill>
           <a:srgbClr val="16324F"/>
         </a:solidFill>
+        <a:effectLst/>
       </p:bgPr>
     </p:bg>
     <p:spTree>
@@ -2733,6 +2502,13 @@
             <a:prstDash val="solid"/>
           </a:ln>
         </p:spPr>
+        <p:txBody>
+          <a:bodyPr/>
+          <a:lstStyle/>
+          <a:p>
+            <a:endParaRPr lang="en-US"/>
+          </a:p>
+        </p:txBody>
       </p:sp>
       <p:sp>
         <p:nvSpPr>
@@ -2758,6 +2534,13 @@
             <a:prstDash val="solid"/>
           </a:ln>
         </p:spPr>
+        <p:txBody>
+          <a:bodyPr/>
+          <a:lstStyle/>
+          <a:p>
+            <a:endParaRPr lang="en-US"/>
+          </a:p>
+        </p:txBody>
       </p:sp>
       <p:sp>
         <p:nvSpPr>
@@ -2780,7 +2563,7 @@
           <a:bodyPr wrap="square" lIns="0" tIns="0" rIns="0" bIns="0" rtlCol="0" anchor="ctr"/>
           <a:lstStyle/>
           <a:p>
-            <a:pPr indent="0" marL="0">
+            <a:pPr marL="0" indent="0">
               <a:buNone/>
             </a:pPr>
             <a:r>
@@ -2792,7 +2575,7 @@
                 <a:ea typeface="Aptos" pitchFamily="34" charset="-122"/>
                 <a:cs typeface="Aptos" pitchFamily="34" charset="-120"/>
               </a:rPr>
-              <a:t>LECTURE 11</a:t>
+              <a:t>WEEK 6 ● LECTURE 11</a:t>
             </a:r>
             <a:endParaRPr lang="en-US" sz="1400" dirty="0"/>
           </a:p>
@@ -2821,7 +2604,7 @@
           </a:bodyPr>
           <a:lstStyle/>
           <a:p>
-            <a:pPr indent="0" marL="0">
+            <a:pPr marL="0" indent="0">
               <a:buNone/>
             </a:pPr>
             <a:r>
@@ -2838,7 +2621,7 @@
             <a:endParaRPr lang="en-US" sz="3500" dirty="0"/>
           </a:p>
           <a:p>
-            <a:pPr indent="0" marL="0">
+            <a:pPr marL="0" indent="0">
               <a:buNone/>
             </a:pPr>
             <a:r>
@@ -2855,7 +2638,7 @@
             <a:endParaRPr lang="en-US" sz="3500" dirty="0"/>
           </a:p>
           <a:p>
-            <a:pPr indent="0" marL="0">
+            <a:pPr marL="0" indent="0">
               <a:buNone/>
             </a:pPr>
             <a:r>
@@ -2892,11 +2675,11 @@
         </p:spPr>
         <p:txBody>
           <a:bodyPr wrap="square" lIns="0" tIns="0" rIns="0" bIns="0" rtlCol="0" anchor="ctr">
-            <a:normAutofit/>
+            <a:normAutofit lnSpcReduction="10000"/>
           </a:bodyPr>
           <a:lstStyle/>
           <a:p>
-            <a:pPr indent="0" marL="0">
+            <a:pPr marL="0" indent="0">
               <a:buNone/>
             </a:pPr>
             <a:r>
@@ -2938,6 +2721,13 @@
             <a:prstDash val="solid"/>
           </a:ln>
         </p:spPr>
+        <p:txBody>
+          <a:bodyPr/>
+          <a:lstStyle/>
+          <a:p>
+            <a:endParaRPr lang="en-US"/>
+          </a:p>
+        </p:txBody>
       </p:sp>
       <p:sp>
         <p:nvSpPr>
@@ -2962,7 +2752,7 @@
           </a:bodyPr>
           <a:lstStyle/>
           <a:p>
-            <a:pPr algn="ctr" indent="0" marL="0">
+            <a:pPr marL="0" indent="0" algn="ctr">
               <a:buNone/>
             </a:pPr>
             <a:r>
@@ -3001,7 +2791,7 @@
           <a:bodyPr wrap="square" lIns="0" tIns="0" rIns="0" bIns="0" rtlCol="0" anchor="ctr"/>
           <a:lstStyle/>
           <a:p>
-            <a:pPr algn="ctr" indent="0" marL="0">
+            <a:pPr marL="0" indent="0" algn="ctr">
               <a:buNone/>
             </a:pPr>
             <a:r>
@@ -3018,7 +2808,7 @@
             <a:endParaRPr lang="en-US" sz="1800" dirty="0"/>
           </a:p>
           <a:p>
-            <a:pPr algn="ctr" indent="0" marL="0">
+            <a:pPr marL="0" indent="0" algn="ctr">
               <a:buNone/>
             </a:pPr>
             <a:r>
@@ -3060,6 +2850,13 @@
             <a:tailEnd type="triangle"/>
           </a:ln>
         </p:spPr>
+        <p:txBody>
+          <a:bodyPr/>
+          <a:lstStyle/>
+          <a:p>
+            <a:endParaRPr lang="en-US"/>
+          </a:p>
+        </p:txBody>
       </p:sp>
       <p:sp>
         <p:nvSpPr>
@@ -3085,6 +2882,13 @@
             <a:prstDash val="solid"/>
           </a:ln>
         </p:spPr>
+        <p:txBody>
+          <a:bodyPr/>
+          <a:lstStyle/>
+          <a:p>
+            <a:endParaRPr lang="en-US"/>
+          </a:p>
+        </p:txBody>
       </p:sp>
       <p:sp>
         <p:nvSpPr>
@@ -3109,7 +2913,7 @@
           </a:bodyPr>
           <a:lstStyle/>
           <a:p>
-            <a:pPr algn="ctr" indent="0" marL="0">
+            <a:pPr marL="0" indent="0" algn="ctr">
               <a:buNone/>
             </a:pPr>
             <a:r>
@@ -3126,7 +2930,7 @@
             <a:endParaRPr lang="en-US" sz="1600" dirty="0"/>
           </a:p>
           <a:p>
-            <a:pPr algn="ctr" indent="0" marL="0">
+            <a:pPr marL="0" indent="0" algn="ctr">
               <a:buNone/>
             </a:pPr>
             <a:r>
@@ -3165,7 +2969,7 @@
           <a:bodyPr wrap="square" lIns="0" tIns="0" rIns="0" bIns="0" rtlCol="0" anchor="ctr"/>
           <a:lstStyle/>
           <a:p>
-            <a:pPr indent="0" marL="0">
+            <a:pPr marL="0" indent="0">
               <a:buNone/>
             </a:pPr>
             <a:r>
@@ -3229,7 +3033,7 @@
           <a:bodyPr wrap="square" lIns="0" tIns="0" rIns="0" bIns="0" rtlCol="0" anchor="ctr"/>
           <a:lstStyle/>
           <a:p>
-            <a:pPr indent="0" marL="0">
+            <a:pPr marL="0" indent="0">
               <a:buNone/>
             </a:pPr>
             <a:r>
@@ -3270,7 +3074,7 @@
           </a:bodyPr>
           <a:lstStyle/>
           <a:p>
-            <a:pPr indent="0" marL="0">
+            <a:pPr marL="0" indent="0">
               <a:buNone/>
             </a:pPr>
             <a:r>
@@ -3290,14 +3094,14 @@
       </p:sp>
       <p:pic>
         <p:nvPicPr>
-          <p:cNvPr id="4" name="Image 0" descr="/mnt/data/week6_multirate/assets/anti_alias_filter.png">    </p:cNvPr>
+          <p:cNvPr id="4" name="Image 0" descr="/mnt/data/week6_multirate/assets/anti_alias_filter.png"/>
           <p:cNvPicPr>
             <a:picLocks noChangeAspect="1"/>
           </p:cNvPicPr>
           <p:nvPr/>
         </p:nvPicPr>
         <p:blipFill>
-          <a:blip r:embed="rId1"/>
+          <a:blip r:embed="rId3"/>
           <a:stretch>
             <a:fillRect/>
           </a:stretch>
@@ -3335,7 +3139,7 @@
           </a:bodyPr>
           <a:lstStyle/>
           <a:p>
-            <a:pPr indent="0" marL="0">
+            <a:pPr marL="0" indent="0">
               <a:buNone/>
             </a:pPr>
             <a:r>
@@ -3349,9 +3153,6 @@
               </a:rPr>
               <a:t>• </a:t>
             </a:r>
-            <a:pPr indent="0" marL="0">
-              <a:buNone/>
-            </a:pPr>
             <a:r>
               <a:rPr lang="en-US" sz="1750" dirty="0">
                 <a:solidFill>
@@ -3361,11 +3162,20 @@
                 <a:ea typeface="Aptos" pitchFamily="34" charset="-122"/>
                 <a:cs typeface="Aptos" pitchFamily="34" charset="-120"/>
               </a:rPr>
-              <a:t>Output Nyquist limit corresponds to input |ω| = π/2.</a:t>
-            </a:r>
-            <a:pPr indent="0" marL="0">
-              <a:buNone/>
-            </a:pPr>
+              <a:t>Output Nyquist limit corresponds to input |ω| = π/2.
+</a:t>
+            </a:r>
+            <a:r>
+              <a:rPr lang="en-US" sz="1750" b="1" dirty="0">
+                <a:solidFill>
+                  <a:srgbClr val="2F80A6"/>
+                </a:solidFill>
+                <a:latin typeface="Aptos" pitchFamily="34" charset="0"/>
+                <a:ea typeface="Aptos" pitchFamily="34" charset="-122"/>
+                <a:cs typeface="Aptos" pitchFamily="34" charset="-120"/>
+              </a:rPr>
+              <a:t>• </a:t>
+            </a:r>
             <a:r>
               <a:rPr lang="en-US" sz="1750" dirty="0">
                 <a:solidFill>
@@ -3375,12 +3185,9 @@
                 <a:ea typeface="Aptos" pitchFamily="34" charset="-122"/>
                 <a:cs typeface="Aptos" pitchFamily="34" charset="-120"/>
               </a:rPr>
-              <a:t>
+              <a:t>Preserve the useful band below the transition region.
 </a:t>
             </a:r>
-            <a:pPr indent="0" marL="0">
-              <a:buNone/>
-            </a:pPr>
             <a:r>
               <a:rPr lang="en-US" sz="1750" b="1" dirty="0">
                 <a:solidFill>
@@ -3392,9 +3199,6 @@
               </a:rPr>
               <a:t>• </a:t>
             </a:r>
-            <a:pPr indent="0" marL="0">
-              <a:buNone/>
-            </a:pPr>
             <a:r>
               <a:rPr lang="en-US" sz="1750" dirty="0">
                 <a:solidFill>
@@ -3404,26 +3208,9 @@
                 <a:ea typeface="Aptos" pitchFamily="34" charset="-122"/>
                 <a:cs typeface="Aptos" pitchFamily="34" charset="-120"/>
               </a:rPr>
-              <a:t>Preserve the useful band below the transition region.</a:t>
-            </a:r>
-            <a:pPr indent="0" marL="0">
-              <a:buNone/>
-            </a:pPr>
-            <a:r>
-              <a:rPr lang="en-US" sz="1750" dirty="0">
-                <a:solidFill>
-                  <a:srgbClr val="1E293B"/>
-                </a:solidFill>
-                <a:latin typeface="Aptos" pitchFamily="34" charset="0"/>
-                <a:ea typeface="Aptos" pitchFamily="34" charset="-122"/>
-                <a:cs typeface="Aptos" pitchFamily="34" charset="-120"/>
-              </a:rPr>
-              <a:t>
+              <a:t>Suppress energy above π/2 before ↓2.
 </a:t>
             </a:r>
-            <a:pPr indent="0" marL="0">
-              <a:buNone/>
-            </a:pPr>
             <a:r>
               <a:rPr lang="en-US" sz="1750" b="1" dirty="0">
                 <a:solidFill>
@@ -3435,52 +3222,6 @@
               </a:rPr>
               <a:t>• </a:t>
             </a:r>
-            <a:pPr indent="0" marL="0">
-              <a:buNone/>
-            </a:pPr>
-            <a:r>
-              <a:rPr lang="en-US" sz="1750" dirty="0">
-                <a:solidFill>
-                  <a:srgbClr val="1E293B"/>
-                </a:solidFill>
-                <a:latin typeface="Aptos" pitchFamily="34" charset="0"/>
-                <a:ea typeface="Aptos" pitchFamily="34" charset="-122"/>
-                <a:cs typeface="Aptos" pitchFamily="34" charset="-120"/>
-              </a:rPr>
-              <a:t>Suppress energy above π/2 before ↓2.</a:t>
-            </a:r>
-            <a:pPr indent="0" marL="0">
-              <a:buNone/>
-            </a:pPr>
-            <a:r>
-              <a:rPr lang="en-US" sz="1750" dirty="0">
-                <a:solidFill>
-                  <a:srgbClr val="1E293B"/>
-                </a:solidFill>
-                <a:latin typeface="Aptos" pitchFamily="34" charset="0"/>
-                <a:ea typeface="Aptos" pitchFamily="34" charset="-122"/>
-                <a:cs typeface="Aptos" pitchFamily="34" charset="-120"/>
-              </a:rPr>
-              <a:t>
-</a:t>
-            </a:r>
-            <a:pPr indent="0" marL="0">
-              <a:buNone/>
-            </a:pPr>
-            <a:r>
-              <a:rPr lang="en-US" sz="1750" b="1" dirty="0">
-                <a:solidFill>
-                  <a:srgbClr val="2F80A6"/>
-                </a:solidFill>
-                <a:latin typeface="Aptos" pitchFamily="34" charset="0"/>
-                <a:ea typeface="Aptos" pitchFamily="34" charset="-122"/>
-                <a:cs typeface="Aptos" pitchFamily="34" charset="-120"/>
-              </a:rPr>
-              <a:t>• </a:t>
-            </a:r>
-            <a:pPr indent="0" marL="0">
-              <a:buNone/>
-            </a:pPr>
             <a:r>
               <a:rPr lang="en-US" sz="1750" dirty="0">
                 <a:solidFill>
@@ -3522,13 +3263,20 @@
             <a:prstDash val="solid"/>
           </a:ln>
           <a:effectLst>
-            <a:outerShdw sx="100000" sy="100000" kx="0" ky="0" algn="bl" rotWithShape="0" blurRad="16510" dist="8890" dir="2700000">
+            <a:outerShdw blurRad="16510" dist="8890" dir="2700000" algn="bl" rotWithShape="0">
               <a:srgbClr val="000000">
                 <a:alpha val="12000"/>
               </a:srgbClr>
             </a:outerShdw>
           </a:effectLst>
         </p:spPr>
+        <p:txBody>
+          <a:bodyPr/>
+          <a:lstStyle/>
+          <a:p>
+            <a:endParaRPr lang="en-US"/>
+          </a:p>
+        </p:txBody>
       </p:sp>
       <p:sp>
         <p:nvSpPr>
@@ -3551,7 +3299,7 @@
           <a:bodyPr wrap="square" lIns="0" tIns="0" rIns="0" bIns="0" rtlCol="0" anchor="ctr"/>
           <a:lstStyle/>
           <a:p>
-            <a:pPr indent="0" marL="0">
+            <a:pPr marL="0" indent="0">
               <a:buNone/>
             </a:pPr>
             <a:r>
@@ -3588,11 +3336,11 @@
         </p:spPr>
         <p:txBody>
           <a:bodyPr wrap="square" lIns="0" tIns="0" rIns="0" bIns="0" rtlCol="0" anchor="ctr">
-            <a:normAutofit/>
+            <a:normAutofit fontScale="92500"/>
           </a:bodyPr>
           <a:lstStyle/>
           <a:p>
-            <a:pPr indent="0" marL="0">
+            <a:pPr marL="0" indent="0">
               <a:buNone/>
             </a:pPr>
             <a:r>
@@ -3630,7 +3378,7 @@
           </a:prstGeom>
           <a:extLst>
             <a:ext uri="{C572A759-6A51-4108-AA02-DFA0A04FC94B}">
-              <ma14:wrappingTextBoxFlag xmlns:ma14="http://schemas.microsoft.com/office/mac/drawingml/2011/main" val="0"/>
+              <ma14:wrappingTextBoxFlag xmlns:ma14="http://schemas.microsoft.com/office/mac/drawingml/2011/main" xmlns="" val="0"/>
             </a:ext>
           </a:extLst>
         </p:spPr>
@@ -3651,7 +3399,7 @@
           <a:p>
             <a:pPr algn="r"/>
             <a:fld id="{F7021451-1387-4CA6-816F-3879F97B5CBC}" type="slidenum">
-              <a:rPr b="0" lang="en-US"/>
+              <a:rPr lang="en-US" b="0"/>
               <a:t>10</a:t>
             </a:fld>
             <a:endParaRPr lang="en-US"/>
@@ -3704,7 +3452,7 @@
           <a:bodyPr wrap="square" lIns="0" tIns="0" rIns="0" bIns="0" rtlCol="0" anchor="ctr"/>
           <a:lstStyle/>
           <a:p>
-            <a:pPr indent="0" marL="0">
+            <a:pPr marL="0" indent="0">
               <a:buNone/>
             </a:pPr>
             <a:r>
@@ -3745,7 +3493,7 @@
           </a:bodyPr>
           <a:lstStyle/>
           <a:p>
-            <a:pPr indent="0" marL="0">
+            <a:pPr marL="0" indent="0">
               <a:buNone/>
             </a:pPr>
             <a:r>
@@ -3789,13 +3537,20 @@
             <a:prstDash val="solid"/>
           </a:ln>
           <a:effectLst>
-            <a:outerShdw sx="100000" sy="100000" kx="0" ky="0" algn="bl" rotWithShape="0" blurRad="16510" dist="8890" dir="2700000">
+            <a:outerShdw blurRad="16510" dist="8890" dir="2700000" algn="bl" rotWithShape="0">
               <a:srgbClr val="000000">
                 <a:alpha val="12000"/>
               </a:srgbClr>
             </a:outerShdw>
           </a:effectLst>
         </p:spPr>
+        <p:txBody>
+          <a:bodyPr/>
+          <a:lstStyle/>
+          <a:p>
+            <a:endParaRPr lang="en-US"/>
+          </a:p>
+        </p:txBody>
       </p:sp>
       <p:sp>
         <p:nvSpPr>
@@ -3818,7 +3573,7 @@
           <a:bodyPr wrap="square" lIns="0" tIns="0" rIns="0" bIns="0" rtlCol="0" anchor="ctr"/>
           <a:lstStyle/>
           <a:p>
-            <a:pPr indent="0" marL="0">
+            <a:pPr marL="0" indent="0">
               <a:buNone/>
             </a:pPr>
             <a:r>
@@ -3859,7 +3614,7 @@
           </a:bodyPr>
           <a:lstStyle/>
           <a:p>
-            <a:pPr indent="0" marL="0">
+            <a:pPr marL="0" indent="0">
               <a:buNone/>
             </a:pPr>
             <a:r>
@@ -3903,13 +3658,20 @@
             <a:prstDash val="solid"/>
           </a:ln>
           <a:effectLst>
-            <a:outerShdw sx="100000" sy="100000" kx="0" ky="0" algn="bl" rotWithShape="0" blurRad="16510" dist="8890" dir="2700000">
+            <a:outerShdw blurRad="16510" dist="8890" dir="2700000" algn="bl" rotWithShape="0">
               <a:srgbClr val="000000">
                 <a:alpha val="12000"/>
               </a:srgbClr>
             </a:outerShdw>
           </a:effectLst>
         </p:spPr>
+        <p:txBody>
+          <a:bodyPr/>
+          <a:lstStyle/>
+          <a:p>
+            <a:endParaRPr lang="en-US"/>
+          </a:p>
+        </p:txBody>
       </p:sp>
       <p:sp>
         <p:nvSpPr>
@@ -3932,7 +3694,7 @@
           <a:bodyPr wrap="square" lIns="0" tIns="0" rIns="0" bIns="0" rtlCol="0" anchor="ctr"/>
           <a:lstStyle/>
           <a:p>
-            <a:pPr indent="0" marL="0">
+            <a:pPr marL="0" indent="0">
               <a:buNone/>
             </a:pPr>
             <a:r>
@@ -3973,7 +3735,7 @@
           </a:bodyPr>
           <a:lstStyle/>
           <a:p>
-            <a:pPr indent="0" marL="0">
+            <a:pPr marL="0" indent="0">
               <a:buNone/>
             </a:pPr>
             <a:r>
@@ -4017,13 +3779,20 @@
             <a:prstDash val="solid"/>
           </a:ln>
           <a:effectLst>
-            <a:outerShdw sx="100000" sy="100000" kx="0" ky="0" algn="bl" rotWithShape="0" blurRad="16510" dist="8890" dir="2700000">
+            <a:outerShdw blurRad="16510" dist="8890" dir="2700000" algn="bl" rotWithShape="0">
               <a:srgbClr val="000000">
                 <a:alpha val="12000"/>
               </a:srgbClr>
             </a:outerShdw>
           </a:effectLst>
         </p:spPr>
+        <p:txBody>
+          <a:bodyPr/>
+          <a:lstStyle/>
+          <a:p>
+            <a:endParaRPr lang="en-US"/>
+          </a:p>
+        </p:txBody>
       </p:sp>
       <p:sp>
         <p:nvSpPr>
@@ -4046,7 +3815,7 @@
           <a:bodyPr wrap="square" lIns="0" tIns="0" rIns="0" bIns="0" rtlCol="0" anchor="ctr"/>
           <a:lstStyle/>
           <a:p>
-            <a:pPr indent="0" marL="0">
+            <a:pPr marL="0" indent="0">
               <a:buNone/>
             </a:pPr>
             <a:r>
@@ -4087,7 +3856,7 @@
           </a:bodyPr>
           <a:lstStyle/>
           <a:p>
-            <a:pPr indent="0" marL="0">
+            <a:pPr marL="0" indent="0">
               <a:buNone/>
             </a:pPr>
             <a:r>
@@ -4131,13 +3900,20 @@
             <a:prstDash val="solid"/>
           </a:ln>
           <a:effectLst>
-            <a:outerShdw sx="100000" sy="100000" kx="0" ky="0" algn="bl" rotWithShape="0" blurRad="16510" dist="8890" dir="2700000">
+            <a:outerShdw blurRad="16510" dist="8890" dir="2700000" algn="bl" rotWithShape="0">
               <a:srgbClr val="000000">
                 <a:alpha val="12000"/>
               </a:srgbClr>
             </a:outerShdw>
           </a:effectLst>
         </p:spPr>
+        <p:txBody>
+          <a:bodyPr/>
+          <a:lstStyle/>
+          <a:p>
+            <a:endParaRPr lang="en-US"/>
+          </a:p>
+        </p:txBody>
       </p:sp>
       <p:sp>
         <p:nvSpPr>
@@ -4160,7 +3936,7 @@
           <a:bodyPr wrap="square" lIns="0" tIns="0" rIns="0" bIns="0" rtlCol="0" anchor="ctr"/>
           <a:lstStyle/>
           <a:p>
-            <a:pPr indent="0" marL="0">
+            <a:pPr marL="0" indent="0">
               <a:buNone/>
             </a:pPr>
             <a:r>
@@ -4201,7 +3977,7 @@
           </a:bodyPr>
           <a:lstStyle/>
           <a:p>
-            <a:pPr indent="0" marL="0">
+            <a:pPr marL="0" indent="0">
               <a:buNone/>
             </a:pPr>
             <a:r>
@@ -4242,7 +4018,7 @@
           </a:bodyPr>
           <a:lstStyle/>
           <a:p>
-            <a:pPr algn="ctr" indent="0" marL="0">
+            <a:pPr marL="0" indent="0" algn="ctr">
               <a:buNone/>
             </a:pPr>
             <a:r>
@@ -4280,7 +4056,7 @@
           </a:prstGeom>
           <a:extLst>
             <a:ext uri="{C572A759-6A51-4108-AA02-DFA0A04FC94B}">
-              <ma14:wrappingTextBoxFlag xmlns:ma14="http://schemas.microsoft.com/office/mac/drawingml/2011/main" val="0"/>
+              <ma14:wrappingTextBoxFlag xmlns:ma14="http://schemas.microsoft.com/office/mac/drawingml/2011/main" xmlns="" val="0"/>
             </a:ext>
           </a:extLst>
         </p:spPr>
@@ -4301,7 +4077,7 @@
           <a:p>
             <a:pPr algn="r"/>
             <a:fld id="{F7021451-1387-4CA6-816F-3879F97B5CBC}" type="slidenum">
-              <a:rPr b="0" lang="en-US"/>
+              <a:rPr lang="en-US" b="0"/>
               <a:t>11</a:t>
             </a:fld>
             <a:endParaRPr lang="en-US"/>
@@ -4354,7 +4130,7 @@
           <a:bodyPr wrap="square" lIns="0" tIns="0" rIns="0" bIns="0" rtlCol="0" anchor="ctr"/>
           <a:lstStyle/>
           <a:p>
-            <a:pPr indent="0" marL="0">
+            <a:pPr marL="0" indent="0">
               <a:buNone/>
             </a:pPr>
             <a:r>
@@ -4395,7 +4171,7 @@
           </a:bodyPr>
           <a:lstStyle/>
           <a:p>
-            <a:pPr indent="0" marL="0">
+            <a:pPr marL="0" indent="0">
               <a:buNone/>
             </a:pPr>
             <a:r>
@@ -4437,6 +4213,13 @@
             <a:prstDash val="solid"/>
           </a:ln>
         </p:spPr>
+        <p:txBody>
+          <a:bodyPr/>
+          <a:lstStyle/>
+          <a:p>
+            <a:endParaRPr lang="en-US"/>
+          </a:p>
+        </p:txBody>
       </p:sp>
       <p:sp>
         <p:nvSpPr>
@@ -4461,7 +4244,7 @@
           </a:bodyPr>
           <a:lstStyle/>
           <a:p>
-            <a:pPr algn="ctr" indent="0" marL="0">
+            <a:pPr marL="0" indent="0" algn="ctr">
               <a:buNone/>
             </a:pPr>
             <a:r>
@@ -4503,6 +4286,13 @@
             <a:prstDash val="solid"/>
           </a:ln>
         </p:spPr>
+        <p:txBody>
+          <a:bodyPr/>
+          <a:lstStyle/>
+          <a:p>
+            <a:endParaRPr lang="en-US"/>
+          </a:p>
+        </p:txBody>
       </p:sp>
       <p:sp>
         <p:nvSpPr>
@@ -4525,7 +4315,7 @@
           <a:bodyPr wrap="square" lIns="0" tIns="0" rIns="0" bIns="0" rtlCol="0" anchor="ctr"/>
           <a:lstStyle/>
           <a:p>
-            <a:pPr algn="ctr" indent="0" marL="0">
+            <a:pPr marL="0" indent="0" algn="ctr">
               <a:buNone/>
             </a:pPr>
             <a:r>
@@ -4563,7 +4353,7 @@
           </a:prstGeom>
           <a:extLst>
             <a:ext uri="{C572A759-6A51-4108-AA02-DFA0A04FC94B}">
-              <ma14:wrappingTextBoxFlag xmlns:ma14="http://schemas.microsoft.com/office/mac/drawingml/2011/main" val="0"/>
+              <ma14:wrappingTextBoxFlag xmlns:ma14="http://schemas.microsoft.com/office/mac/drawingml/2011/main" xmlns="" val="0"/>
             </a:ext>
           </a:extLst>
         </p:spPr>
@@ -4584,7 +4374,7 @@
           <a:p>
             <a:pPr algn="r"/>
             <a:fld id="{F7021451-1387-4CA6-816F-3879F97B5CBC}" type="slidenum">
-              <a:rPr b="0" lang="en-US"/>
+              <a:rPr lang="en-US" b="0"/>
               <a:t>12</a:t>
             </a:fld>
             <a:endParaRPr lang="en-US"/>
@@ -4607,6 +4397,7 @@
         <a:solidFill>
           <a:srgbClr val="16324F"/>
         </a:solidFill>
+        <a:effectLst/>
       </p:bgPr>
     </p:bg>
     <p:spTree>
@@ -4644,7 +4435,7 @@
           <a:bodyPr wrap="square" lIns="0" tIns="0" rIns="0" bIns="0" rtlCol="0" anchor="ctr"/>
           <a:lstStyle/>
           <a:p>
-            <a:pPr indent="0" marL="0">
+            <a:pPr marL="0" indent="0">
               <a:buNone/>
             </a:pPr>
             <a:r>
@@ -4685,7 +4476,7 @@
           </a:bodyPr>
           <a:lstStyle/>
           <a:p>
-            <a:pPr indent="0" marL="0">
+            <a:pPr marL="0" indent="0">
               <a:buNone/>
             </a:pPr>
             <a:r>
@@ -4726,7 +4517,7 @@
           </a:bodyPr>
           <a:lstStyle/>
           <a:p>
-            <a:pPr indent="0" marL="0">
+            <a:pPr marL="0" indent="0">
               <a:buNone/>
             </a:pPr>
             <a:r>
@@ -4790,7 +4581,7 @@
           <a:bodyPr wrap="square" lIns="0" tIns="0" rIns="0" bIns="0" rtlCol="0" anchor="ctr"/>
           <a:lstStyle/>
           <a:p>
-            <a:pPr indent="0" marL="0">
+            <a:pPr marL="0" indent="0">
               <a:buNone/>
             </a:pPr>
             <a:r>
@@ -4831,7 +4622,7 @@
           </a:bodyPr>
           <a:lstStyle/>
           <a:p>
-            <a:pPr indent="0" marL="0">
+            <a:pPr marL="0" indent="0">
               <a:buNone/>
             </a:pPr>
             <a:r>
@@ -4873,6 +4664,13 @@
             <a:prstDash val="solid"/>
           </a:ln>
         </p:spPr>
+        <p:txBody>
+          <a:bodyPr/>
+          <a:lstStyle/>
+          <a:p>
+            <a:endParaRPr lang="en-US"/>
+          </a:p>
+        </p:txBody>
       </p:sp>
       <p:sp>
         <p:nvSpPr>
@@ -4897,7 +4695,7 @@
           </a:bodyPr>
           <a:lstStyle/>
           <a:p>
-            <a:pPr algn="ctr" indent="0" marL="0">
+            <a:pPr marL="0" indent="0" algn="ctr">
               <a:buNone/>
             </a:pPr>
             <a:r>
@@ -4914,7 +4712,7 @@
             <a:endParaRPr lang="en-US" sz="1600" dirty="0"/>
           </a:p>
           <a:p>
-            <a:pPr algn="ctr" indent="0" marL="0">
+            <a:pPr marL="0" indent="0" algn="ctr">
               <a:buNone/>
             </a:pPr>
             <a:r>
@@ -4956,6 +4754,13 @@
             <a:tailEnd type="triangle"/>
           </a:ln>
         </p:spPr>
+        <p:txBody>
+          <a:bodyPr/>
+          <a:lstStyle/>
+          <a:p>
+            <a:endParaRPr lang="en-US"/>
+          </a:p>
+        </p:txBody>
       </p:sp>
       <p:sp>
         <p:nvSpPr>
@@ -4981,6 +4786,13 @@
             <a:prstDash val="solid"/>
           </a:ln>
         </p:spPr>
+        <p:txBody>
+          <a:bodyPr/>
+          <a:lstStyle/>
+          <a:p>
+            <a:endParaRPr lang="en-US"/>
+          </a:p>
+        </p:txBody>
       </p:sp>
       <p:sp>
         <p:nvSpPr>
@@ -5005,7 +4817,7 @@
           </a:bodyPr>
           <a:lstStyle/>
           <a:p>
-            <a:pPr algn="ctr" indent="0" marL="0">
+            <a:pPr marL="0" indent="0" algn="ctr">
               <a:buNone/>
             </a:pPr>
             <a:r>
@@ -5022,7 +4834,7 @@
             <a:endParaRPr lang="en-US" sz="1600" dirty="0"/>
           </a:p>
           <a:p>
-            <a:pPr algn="ctr" indent="0" marL="0">
+            <a:pPr marL="0" indent="0" algn="ctr">
               <a:buNone/>
             </a:pPr>
             <a:r>
@@ -5064,6 +4876,13 @@
             <a:tailEnd type="triangle"/>
           </a:ln>
         </p:spPr>
+        <p:txBody>
+          <a:bodyPr/>
+          <a:lstStyle/>
+          <a:p>
+            <a:endParaRPr lang="en-US"/>
+          </a:p>
+        </p:txBody>
       </p:sp>
       <p:sp>
         <p:nvSpPr>
@@ -5089,6 +4908,13 @@
             <a:prstDash val="solid"/>
           </a:ln>
         </p:spPr>
+        <p:txBody>
+          <a:bodyPr/>
+          <a:lstStyle/>
+          <a:p>
+            <a:endParaRPr lang="en-US"/>
+          </a:p>
+        </p:txBody>
       </p:sp>
       <p:sp>
         <p:nvSpPr>
@@ -5113,7 +4939,7 @@
           </a:bodyPr>
           <a:lstStyle/>
           <a:p>
-            <a:pPr algn="ctr" indent="0" marL="0">
+            <a:pPr marL="0" indent="0" algn="ctr">
               <a:buNone/>
             </a:pPr>
             <a:r>
@@ -5130,7 +4956,7 @@
             <a:endParaRPr lang="en-US" sz="1600" dirty="0"/>
           </a:p>
           <a:p>
-            <a:pPr algn="ctr" indent="0" marL="0">
+            <a:pPr marL="0" indent="0" algn="ctr">
               <a:buNone/>
             </a:pPr>
             <a:r>
@@ -5172,6 +4998,13 @@
             <a:tailEnd type="triangle"/>
           </a:ln>
         </p:spPr>
+        <p:txBody>
+          <a:bodyPr/>
+          <a:lstStyle/>
+          <a:p>
+            <a:endParaRPr lang="en-US"/>
+          </a:p>
+        </p:txBody>
       </p:sp>
       <p:sp>
         <p:nvSpPr>
@@ -5197,6 +5030,13 @@
             <a:prstDash val="solid"/>
           </a:ln>
         </p:spPr>
+        <p:txBody>
+          <a:bodyPr/>
+          <a:lstStyle/>
+          <a:p>
+            <a:endParaRPr lang="en-US"/>
+          </a:p>
+        </p:txBody>
       </p:sp>
       <p:sp>
         <p:nvSpPr>
@@ -5221,7 +5061,7 @@
           </a:bodyPr>
           <a:lstStyle/>
           <a:p>
-            <a:pPr algn="ctr" indent="0" marL="0">
+            <a:pPr marL="0" indent="0" algn="ctr">
               <a:buNone/>
             </a:pPr>
             <a:r>
@@ -5238,7 +5078,7 @@
             <a:endParaRPr lang="en-US" sz="1600" dirty="0"/>
           </a:p>
           <a:p>
-            <a:pPr algn="ctr" indent="0" marL="0">
+            <a:pPr marL="0" indent="0" algn="ctr">
               <a:buNone/>
             </a:pPr>
             <a:r>
@@ -5258,17 +5098,17 @@
       </p:sp>
       <p:pic>
         <p:nvPicPr>
-          <p:cNvPr id="15" name="Image 0" descr="preencoded.png">    </p:cNvPr>
+          <p:cNvPr id="15" name="Image 0" descr="preencoded.png"/>
           <p:cNvPicPr>
             <a:picLocks noChangeAspect="1"/>
           </p:cNvPicPr>
           <p:nvPr/>
         </p:nvPicPr>
         <p:blipFill>
-          <a:blip r:embed="rId1">
+          <a:blip>
             <a:extLst>
               <a:ext uri="{96DAC541-7B7A-43D3-8B79-37D633B846F1}">
-                <asvg:svgBlip xmlns:asvg="http://schemas.microsoft.com/office/drawing/2016/SVG/main" r:embed="rId2"/>
+                <asvg:svgBlip xmlns:asvg="http://schemas.microsoft.com/office/drawing/2016/SVG/main" r:embed="rId3"/>
               </a:ext>
             </a:extLst>
           </a:blip>
@@ -5312,13 +5152,20 @@
             <a:prstDash val="solid"/>
           </a:ln>
           <a:effectLst>
-            <a:outerShdw sx="100000" sy="100000" kx="0" ky="0" algn="bl" rotWithShape="0" blurRad="16510" dist="8890" dir="2700000">
+            <a:outerShdw blurRad="16510" dist="8890" dir="2700000" algn="bl" rotWithShape="0">
               <a:srgbClr val="000000">
                 <a:alpha val="12000"/>
               </a:srgbClr>
             </a:outerShdw>
           </a:effectLst>
         </p:spPr>
+        <p:txBody>
+          <a:bodyPr/>
+          <a:lstStyle/>
+          <a:p>
+            <a:endParaRPr lang="en-US"/>
+          </a:p>
+        </p:txBody>
       </p:sp>
       <p:sp>
         <p:nvSpPr>
@@ -5341,7 +5188,7 @@
           <a:bodyPr wrap="square" lIns="0" tIns="0" rIns="0" bIns="0" rtlCol="0" anchor="ctr"/>
           <a:lstStyle/>
           <a:p>
-            <a:pPr indent="0" marL="0">
+            <a:pPr marL="0" indent="0">
               <a:buNone/>
             </a:pPr>
             <a:r>
@@ -5382,7 +5229,7 @@
           </a:bodyPr>
           <a:lstStyle/>
           <a:p>
-            <a:pPr indent="0" marL="0">
+            <a:pPr marL="0" indent="0">
               <a:buNone/>
             </a:pPr>
             <a:r>
@@ -5420,7 +5267,7 @@
           </a:prstGeom>
           <a:extLst>
             <a:ext uri="{C572A759-6A51-4108-AA02-DFA0A04FC94B}">
-              <ma14:wrappingTextBoxFlag xmlns:ma14="http://schemas.microsoft.com/office/mac/drawingml/2011/main" val="0"/>
+              <ma14:wrappingTextBoxFlag xmlns:ma14="http://schemas.microsoft.com/office/mac/drawingml/2011/main" xmlns="" val="0"/>
             </a:ext>
           </a:extLst>
         </p:spPr>
@@ -5441,7 +5288,7 @@
           <a:p>
             <a:pPr algn="r"/>
             <a:fld id="{F7021451-1387-4CA6-816F-3879F97B5CBC}" type="slidenum">
-              <a:rPr b="0" lang="en-US"/>
+              <a:rPr lang="en-US" b="0"/>
               <a:t>14</a:t>
             </a:fld>
             <a:endParaRPr lang="en-US"/>
@@ -5494,7 +5341,7 @@
           <a:bodyPr wrap="square" lIns="0" tIns="0" rIns="0" bIns="0" rtlCol="0" anchor="ctr"/>
           <a:lstStyle/>
           <a:p>
-            <a:pPr indent="0" marL="0">
+            <a:pPr marL="0" indent="0">
               <a:buNone/>
             </a:pPr>
             <a:r>
@@ -5535,7 +5382,7 @@
           </a:bodyPr>
           <a:lstStyle/>
           <a:p>
-            <a:pPr indent="0" marL="0">
+            <a:pPr marL="0" indent="0">
               <a:buNone/>
             </a:pPr>
             <a:r>
@@ -5555,14 +5402,14 @@
       </p:sp>
       <p:pic>
         <p:nvPicPr>
-          <p:cNvPr id="4" name="Image 0" descr="/mnt/data/week6_multirate/assets/shift_equivariance.png">    </p:cNvPr>
+          <p:cNvPr id="4" name="Image 0" descr="/mnt/data/week6_multirate/assets/shift_equivariance.png"/>
           <p:cNvPicPr>
             <a:picLocks noChangeAspect="1"/>
           </p:cNvPicPr>
           <p:nvPr/>
         </p:nvPicPr>
         <p:blipFill>
-          <a:blip r:embed="rId1"/>
+          <a:blip r:embed="rId3"/>
           <a:stretch>
             <a:fillRect/>
           </a:stretch>
@@ -5600,7 +5447,7 @@
           </a:bodyPr>
           <a:lstStyle/>
           <a:p>
-            <a:pPr indent="0" marL="0">
+            <a:pPr marL="0" indent="0">
               <a:buNone/>
             </a:pPr>
             <a:r>
@@ -5614,9 +5461,6 @@
               </a:rPr>
               <a:t>• </a:t>
             </a:r>
-            <a:pPr indent="0" marL="0">
-              <a:buNone/>
-            </a:pPr>
             <a:r>
               <a:rPr lang="en-US" sz="1720" b="1" dirty="0">
                 <a:solidFill>
@@ -5628,9 +5472,6 @@
               </a:rPr>
               <a:t>Convolution alone</a:t>
             </a:r>
-            <a:pPr indent="0" marL="0">
-              <a:buNone/>
-            </a:pPr>
             <a:r>
               <a:rPr lang="en-US" sz="1720" dirty="0">
                 <a:solidFill>
@@ -5640,11 +5481,31 @@
                 <a:ea typeface="Aptos" pitchFamily="34" charset="-122"/>
                 <a:cs typeface="Aptos" pitchFamily="34" charset="-120"/>
               </a:rPr>
-              <a:t> is shift equivariant (ignoring boundaries).</a:t>
-            </a:r>
-            <a:pPr indent="0" marL="0">
-              <a:buNone/>
-            </a:pPr>
+              <a:t> is shift equivariant (ignoring boundaries).
+</a:t>
+            </a:r>
+            <a:r>
+              <a:rPr lang="en-US" sz="1720" b="1" dirty="0">
+                <a:solidFill>
+                  <a:srgbClr val="2F80A6"/>
+                </a:solidFill>
+                <a:latin typeface="Aptos" pitchFamily="34" charset="0"/>
+                <a:ea typeface="Aptos" pitchFamily="34" charset="-122"/>
+                <a:cs typeface="Aptos" pitchFamily="34" charset="-120"/>
+              </a:rPr>
+              <a:t>• </a:t>
+            </a:r>
+            <a:r>
+              <a:rPr lang="en-US" sz="1720" b="1" dirty="0">
+                <a:solidFill>
+                  <a:srgbClr val="1E293B"/>
+                </a:solidFill>
+                <a:latin typeface="Aptos" pitchFamily="34" charset="0"/>
+                <a:ea typeface="Aptos" pitchFamily="34" charset="-122"/>
+                <a:cs typeface="Aptos" pitchFamily="34" charset="-120"/>
+              </a:rPr>
+              <a:t>Subsampling</a:t>
+            </a:r>
             <a:r>
               <a:rPr lang="en-US" sz="1720" dirty="0">
                 <a:solidFill>
@@ -5654,12 +5515,9 @@
                 <a:ea typeface="Aptos" pitchFamily="34" charset="-122"/>
                 <a:cs typeface="Aptos" pitchFamily="34" charset="-120"/>
               </a:rPr>
-              <a:t>
+              <a:t> chooses a sampling phase.
 </a:t>
             </a:r>
-            <a:pPr indent="0" marL="0">
-              <a:buNone/>
-            </a:pPr>
             <a:r>
               <a:rPr lang="en-US" sz="1720" b="1" dirty="0">
                 <a:solidFill>
@@ -5671,9 +5529,6 @@
               </a:rPr>
               <a:t>• </a:t>
             </a:r>
-            <a:pPr indent="0" marL="0">
-              <a:buNone/>
-            </a:pPr>
             <a:r>
               <a:rPr lang="en-US" sz="1720" b="1" dirty="0">
                 <a:solidFill>
@@ -5683,11 +5538,8 @@
                 <a:ea typeface="Aptos" pitchFamily="34" charset="-122"/>
                 <a:cs typeface="Aptos" pitchFamily="34" charset="-120"/>
               </a:rPr>
-              <a:t>Subsampling</a:t>
-            </a:r>
-            <a:pPr indent="0" marL="0">
-              <a:buNone/>
-            </a:pPr>
+              <a:t>A one-sample input shift</a:t>
+            </a:r>
             <a:r>
               <a:rPr lang="en-US" sz="1720" dirty="0">
                 <a:solidFill>
@@ -5697,13 +5549,22 @@
                 <a:ea typeface="Aptos" pitchFamily="34" charset="-122"/>
                 <a:cs typeface="Aptos" pitchFamily="34" charset="-120"/>
               </a:rPr>
-              <a:t> chooses a sampling phase.</a:t>
-            </a:r>
-            <a:pPr indent="0" marL="0">
-              <a:buNone/>
-            </a:pPr>
-            <a:r>
-              <a:rPr lang="en-US" sz="1720" dirty="0">
+              <a:t> can move energy to a different phase before ↓M.
+</a:t>
+            </a:r>
+            <a:r>
+              <a:rPr lang="en-US" sz="1720" b="1" dirty="0">
+                <a:solidFill>
+                  <a:srgbClr val="2F80A6"/>
+                </a:solidFill>
+                <a:latin typeface="Aptos" pitchFamily="34" charset="0"/>
+                <a:ea typeface="Aptos" pitchFamily="34" charset="-122"/>
+                <a:cs typeface="Aptos" pitchFamily="34" charset="-120"/>
+              </a:rPr>
+              <a:t>• </a:t>
+            </a:r>
+            <a:r>
+              <a:rPr lang="en-US" sz="1720" b="1" dirty="0">
                 <a:solidFill>
                   <a:srgbClr val="1E293B"/>
                 </a:solidFill>
@@ -5711,97 +5572,8 @@
                 <a:ea typeface="Aptos" pitchFamily="34" charset="-122"/>
                 <a:cs typeface="Aptos" pitchFamily="34" charset="-120"/>
               </a:rPr>
-              <a:t>
-</a:t>
-            </a:r>
-            <a:pPr indent="0" marL="0">
-              <a:buNone/>
-            </a:pPr>
-            <a:r>
-              <a:rPr lang="en-US" sz="1720" b="1" dirty="0">
-                <a:solidFill>
-                  <a:srgbClr val="2F80A6"/>
-                </a:solidFill>
-                <a:latin typeface="Aptos" pitchFamily="34" charset="0"/>
-                <a:ea typeface="Aptos" pitchFamily="34" charset="-122"/>
-                <a:cs typeface="Aptos" pitchFamily="34" charset="-120"/>
-              </a:rPr>
-              <a:t>• </a:t>
-            </a:r>
-            <a:pPr indent="0" marL="0">
-              <a:buNone/>
-            </a:pPr>
-            <a:r>
-              <a:rPr lang="en-US" sz="1720" b="1" dirty="0">
-                <a:solidFill>
-                  <a:srgbClr val="1E293B"/>
-                </a:solidFill>
-                <a:latin typeface="Aptos" pitchFamily="34" charset="0"/>
-                <a:ea typeface="Aptos" pitchFamily="34" charset="-122"/>
-                <a:cs typeface="Aptos" pitchFamily="34" charset="-120"/>
-              </a:rPr>
-              <a:t>A one-sample input shift</a:t>
-            </a:r>
-            <a:pPr indent="0" marL="0">
-              <a:buNone/>
-            </a:pPr>
-            <a:r>
-              <a:rPr lang="en-US" sz="1720" dirty="0">
-                <a:solidFill>
-                  <a:srgbClr val="1E293B"/>
-                </a:solidFill>
-                <a:latin typeface="Aptos" pitchFamily="34" charset="0"/>
-                <a:ea typeface="Aptos" pitchFamily="34" charset="-122"/>
-                <a:cs typeface="Aptos" pitchFamily="34" charset="-120"/>
-              </a:rPr>
-              <a:t> can move energy to a different phase before ↓M.</a:t>
-            </a:r>
-            <a:pPr indent="0" marL="0">
-              <a:buNone/>
-            </a:pPr>
-            <a:r>
-              <a:rPr lang="en-US" sz="1720" dirty="0">
-                <a:solidFill>
-                  <a:srgbClr val="1E293B"/>
-                </a:solidFill>
-                <a:latin typeface="Aptos" pitchFamily="34" charset="0"/>
-                <a:ea typeface="Aptos" pitchFamily="34" charset="-122"/>
-                <a:cs typeface="Aptos" pitchFamily="34" charset="-120"/>
-              </a:rPr>
-              <a:t>
-</a:t>
-            </a:r>
-            <a:pPr indent="0" marL="0">
-              <a:buNone/>
-            </a:pPr>
-            <a:r>
-              <a:rPr lang="en-US" sz="1720" b="1" dirty="0">
-                <a:solidFill>
-                  <a:srgbClr val="2F80A6"/>
-                </a:solidFill>
-                <a:latin typeface="Aptos" pitchFamily="34" charset="0"/>
-                <a:ea typeface="Aptos" pitchFamily="34" charset="-122"/>
-                <a:cs typeface="Aptos" pitchFamily="34" charset="-120"/>
-              </a:rPr>
-              <a:t>• </a:t>
-            </a:r>
-            <a:pPr indent="0" marL="0">
-              <a:buNone/>
-            </a:pPr>
-            <a:r>
-              <a:rPr lang="en-US" sz="1720" b="1" dirty="0">
-                <a:solidFill>
-                  <a:srgbClr val="1E293B"/>
-                </a:solidFill>
-                <a:latin typeface="Aptos" pitchFamily="34" charset="0"/>
-                <a:ea typeface="Aptos" pitchFamily="34" charset="-122"/>
-                <a:cs typeface="Aptos" pitchFamily="34" charset="-120"/>
-              </a:rPr>
               <a:t>Aliased high-frequency feature content</a:t>
             </a:r>
-            <a:pPr indent="0" marL="0">
-              <a:buNone/>
-            </a:pPr>
             <a:r>
               <a:rPr lang="en-US" sz="1720" dirty="0">
                 <a:solidFill>
@@ -5843,13 +5615,20 @@
             <a:prstDash val="solid"/>
           </a:ln>
           <a:effectLst>
-            <a:outerShdw sx="100000" sy="100000" kx="0" ky="0" algn="bl" rotWithShape="0" blurRad="16510" dist="8890" dir="2700000">
+            <a:outerShdw blurRad="16510" dist="8890" dir="2700000" algn="bl" rotWithShape="0">
               <a:srgbClr val="000000">
                 <a:alpha val="12000"/>
               </a:srgbClr>
             </a:outerShdw>
           </a:effectLst>
         </p:spPr>
+        <p:txBody>
+          <a:bodyPr/>
+          <a:lstStyle/>
+          <a:p>
+            <a:endParaRPr lang="en-US"/>
+          </a:p>
+        </p:txBody>
       </p:sp>
       <p:sp>
         <p:nvSpPr>
@@ -5872,7 +5651,7 @@
           <a:bodyPr wrap="square" lIns="0" tIns="0" rIns="0" bIns="0" rtlCol="0" anchor="ctr"/>
           <a:lstStyle/>
           <a:p>
-            <a:pPr indent="0" marL="0">
+            <a:pPr marL="0" indent="0">
               <a:buNone/>
             </a:pPr>
             <a:r>
@@ -5909,11 +5688,11 @@
         </p:spPr>
         <p:txBody>
           <a:bodyPr wrap="square" lIns="0" tIns="0" rIns="0" bIns="0" rtlCol="0" anchor="ctr">
-            <a:normAutofit/>
+            <a:normAutofit fontScale="85000" lnSpcReduction="20000"/>
           </a:bodyPr>
           <a:lstStyle/>
           <a:p>
-            <a:pPr indent="0" marL="0">
+            <a:pPr marL="0" indent="0">
               <a:buNone/>
             </a:pPr>
             <a:r>
@@ -5951,7 +5730,7 @@
           </a:prstGeom>
           <a:extLst>
             <a:ext uri="{C572A759-6A51-4108-AA02-DFA0A04FC94B}">
-              <ma14:wrappingTextBoxFlag xmlns:ma14="http://schemas.microsoft.com/office/mac/drawingml/2011/main" val="0"/>
+              <ma14:wrappingTextBoxFlag xmlns:ma14="http://schemas.microsoft.com/office/mac/drawingml/2011/main" xmlns="" val="0"/>
             </a:ext>
           </a:extLst>
         </p:spPr>
@@ -5972,7 +5751,7 @@
           <a:p>
             <a:pPr algn="r"/>
             <a:fld id="{F7021451-1387-4CA6-816F-3879F97B5CBC}" type="slidenum">
-              <a:rPr b="0" lang="en-US"/>
+              <a:rPr lang="en-US" b="0"/>
               <a:t>15</a:t>
             </a:fld>
             <a:endParaRPr lang="en-US"/>
@@ -6025,7 +5804,7 @@
           <a:bodyPr wrap="square" lIns="0" tIns="0" rIns="0" bIns="0" rtlCol="0" anchor="ctr"/>
           <a:lstStyle/>
           <a:p>
-            <a:pPr indent="0" marL="0">
+            <a:pPr marL="0" indent="0">
               <a:buNone/>
             </a:pPr>
             <a:r>
@@ -6066,7 +5845,7 @@
           </a:bodyPr>
           <a:lstStyle/>
           <a:p>
-            <a:pPr indent="0" marL="0">
+            <a:pPr marL="0" indent="0">
               <a:buNone/>
             </a:pPr>
             <a:r>
@@ -6108,6 +5887,13 @@
             <a:prstDash val="solid"/>
           </a:ln>
         </p:spPr>
+        <p:txBody>
+          <a:bodyPr/>
+          <a:lstStyle/>
+          <a:p>
+            <a:endParaRPr lang="en-US"/>
+          </a:p>
+        </p:txBody>
       </p:sp>
       <p:sp>
         <p:nvSpPr>
@@ -6132,7 +5918,7 @@
           </a:bodyPr>
           <a:lstStyle/>
           <a:p>
-            <a:pPr algn="ctr" indent="0" marL="0">
+            <a:pPr marL="0" indent="0" algn="ctr">
               <a:buNone/>
             </a:pPr>
             <a:r>
@@ -6174,6 +5960,13 @@
             <a:tailEnd type="triangle"/>
           </a:ln>
         </p:spPr>
+        <p:txBody>
+          <a:bodyPr/>
+          <a:lstStyle/>
+          <a:p>
+            <a:endParaRPr lang="en-US"/>
+          </a:p>
+        </p:txBody>
       </p:sp>
       <p:sp>
         <p:nvSpPr>
@@ -6199,6 +5992,13 @@
             <a:prstDash val="solid"/>
           </a:ln>
         </p:spPr>
+        <p:txBody>
+          <a:bodyPr/>
+          <a:lstStyle/>
+          <a:p>
+            <a:endParaRPr lang="en-US"/>
+          </a:p>
+        </p:txBody>
       </p:sp>
       <p:sp>
         <p:nvSpPr>
@@ -6223,7 +6023,7 @@
           </a:bodyPr>
           <a:lstStyle/>
           <a:p>
-            <a:pPr algn="ctr" indent="0" marL="0">
+            <a:pPr marL="0" indent="0" algn="ctr">
               <a:buNone/>
             </a:pPr>
             <a:r>
@@ -6265,6 +6065,13 @@
             <a:tailEnd type="triangle"/>
           </a:ln>
         </p:spPr>
+        <p:txBody>
+          <a:bodyPr/>
+          <a:lstStyle/>
+          <a:p>
+            <a:endParaRPr lang="en-US"/>
+          </a:p>
+        </p:txBody>
       </p:sp>
       <p:sp>
         <p:nvSpPr>
@@ -6290,6 +6097,13 @@
             <a:prstDash val="solid"/>
           </a:ln>
         </p:spPr>
+        <p:txBody>
+          <a:bodyPr/>
+          <a:lstStyle/>
+          <a:p>
+            <a:endParaRPr lang="en-US"/>
+          </a:p>
+        </p:txBody>
       </p:sp>
       <p:sp>
         <p:nvSpPr>
@@ -6314,7 +6128,7 @@
           </a:bodyPr>
           <a:lstStyle/>
           <a:p>
-            <a:pPr algn="ctr" indent="0" marL="0">
+            <a:pPr marL="0" indent="0" algn="ctr">
               <a:buNone/>
             </a:pPr>
             <a:r>
@@ -6331,7 +6145,7 @@
             <a:endParaRPr lang="en-US" sz="1600" dirty="0"/>
           </a:p>
           <a:p>
-            <a:pPr algn="ctr" indent="0" marL="0">
+            <a:pPr marL="0" indent="0" algn="ctr">
               <a:buNone/>
             </a:pPr>
             <a:r>
@@ -6373,6 +6187,13 @@
             <a:tailEnd type="triangle"/>
           </a:ln>
         </p:spPr>
+        <p:txBody>
+          <a:bodyPr/>
+          <a:lstStyle/>
+          <a:p>
+            <a:endParaRPr lang="en-US"/>
+          </a:p>
+        </p:txBody>
       </p:sp>
       <p:sp>
         <p:nvSpPr>
@@ -6398,6 +6219,13 @@
             <a:prstDash val="solid"/>
           </a:ln>
         </p:spPr>
+        <p:txBody>
+          <a:bodyPr/>
+          <a:lstStyle/>
+          <a:p>
+            <a:endParaRPr lang="en-US"/>
+          </a:p>
+        </p:txBody>
       </p:sp>
       <p:sp>
         <p:nvSpPr>
@@ -6422,7 +6250,7 @@
           </a:bodyPr>
           <a:lstStyle/>
           <a:p>
-            <a:pPr algn="ctr" indent="0" marL="0">
+            <a:pPr marL="0" indent="0" algn="ctr">
               <a:buNone/>
             </a:pPr>
             <a:r>
@@ -6463,7 +6291,7 @@
           </a:bodyPr>
           <a:lstStyle/>
           <a:p>
-            <a:pPr indent="0" marL="0">
+            <a:pPr marL="0" indent="0">
               <a:buNone/>
             </a:pPr>
             <a:r>
@@ -6477,9 +6305,6 @@
               </a:rPr>
               <a:t>• </a:t>
             </a:r>
-            <a:pPr indent="0" marL="0">
-              <a:buNone/>
-            </a:pPr>
             <a:r>
               <a:rPr lang="en-US" sz="1700" dirty="0">
                 <a:solidFill>
@@ -6489,11 +6314,20 @@
                 <a:ea typeface="Aptos" pitchFamily="34" charset="-122"/>
                 <a:cs typeface="Aptos" pitchFamily="34" charset="-120"/>
               </a:rPr>
-              <a:t>BlurPool-style idea: lowpass before spatial or temporal subsampling.</a:t>
-            </a:r>
-            <a:pPr indent="0" marL="0">
-              <a:buNone/>
-            </a:pPr>
+              <a:t>BlurPool-style idea: lowpass before spatial or temporal subsampling.
+</a:t>
+            </a:r>
+            <a:r>
+              <a:rPr lang="en-US" sz="1700" b="1" dirty="0">
+                <a:solidFill>
+                  <a:srgbClr val="2F80A6"/>
+                </a:solidFill>
+                <a:latin typeface="Aptos" pitchFamily="34" charset="0"/>
+                <a:ea typeface="Aptos" pitchFamily="34" charset="-122"/>
+                <a:cs typeface="Aptos" pitchFamily="34" charset="-120"/>
+              </a:rPr>
+              <a:t>• </a:t>
+            </a:r>
             <a:r>
               <a:rPr lang="en-US" sz="1700" dirty="0">
                 <a:solidFill>
@@ -6503,12 +6337,9 @@
                 <a:ea typeface="Aptos" pitchFamily="34" charset="-122"/>
                 <a:cs typeface="Aptos" pitchFamily="34" charset="-120"/>
               </a:rPr>
-              <a:t>
+              <a:t>Alternative: constrain the strided kernel to have stronger lowpass behavior.
 </a:t>
             </a:r>
-            <a:pPr indent="0" marL="0">
-              <a:buNone/>
-            </a:pPr>
             <a:r>
               <a:rPr lang="en-US" sz="1700" b="1" dirty="0">
                 <a:solidFill>
@@ -6520,52 +6351,6 @@
               </a:rPr>
               <a:t>• </a:t>
             </a:r>
-            <a:pPr indent="0" marL="0">
-              <a:buNone/>
-            </a:pPr>
-            <a:r>
-              <a:rPr lang="en-US" sz="1700" dirty="0">
-                <a:solidFill>
-                  <a:srgbClr val="1E293B"/>
-                </a:solidFill>
-                <a:latin typeface="Aptos" pitchFamily="34" charset="0"/>
-                <a:ea typeface="Aptos" pitchFamily="34" charset="-122"/>
-                <a:cs typeface="Aptos" pitchFamily="34" charset="-120"/>
-              </a:rPr>
-              <a:t>Alternative: constrain the strided kernel to have stronger lowpass behavior.</a:t>
-            </a:r>
-            <a:pPr indent="0" marL="0">
-              <a:buNone/>
-            </a:pPr>
-            <a:r>
-              <a:rPr lang="en-US" sz="1700" dirty="0">
-                <a:solidFill>
-                  <a:srgbClr val="1E293B"/>
-                </a:solidFill>
-                <a:latin typeface="Aptos" pitchFamily="34" charset="0"/>
-                <a:ea typeface="Aptos" pitchFamily="34" charset="-122"/>
-                <a:cs typeface="Aptos" pitchFamily="34" charset="-120"/>
-              </a:rPr>
-              <a:t>
-</a:t>
-            </a:r>
-            <a:pPr indent="0" marL="0">
-              <a:buNone/>
-            </a:pPr>
-            <a:r>
-              <a:rPr lang="en-US" sz="1700" b="1" dirty="0">
-                <a:solidFill>
-                  <a:srgbClr val="2F80A6"/>
-                </a:solidFill>
-                <a:latin typeface="Aptos" pitchFamily="34" charset="0"/>
-                <a:ea typeface="Aptos" pitchFamily="34" charset="-122"/>
-                <a:cs typeface="Aptos" pitchFamily="34" charset="-120"/>
-              </a:rPr>
-              <a:t>• </a:t>
-            </a:r>
-            <a:pPr indent="0" marL="0">
-              <a:buNone/>
-            </a:pPr>
             <a:r>
               <a:rPr lang="en-US" sz="1700" dirty="0">
                 <a:solidFill>
@@ -6601,7 +6386,7 @@
           </a:prstGeom>
           <a:extLst>
             <a:ext uri="{C572A759-6A51-4108-AA02-DFA0A04FC94B}">
-              <ma14:wrappingTextBoxFlag xmlns:ma14="http://schemas.microsoft.com/office/mac/drawingml/2011/main" val="0"/>
+              <ma14:wrappingTextBoxFlag xmlns:ma14="http://schemas.microsoft.com/office/mac/drawingml/2011/main" xmlns="" val="0"/>
             </a:ext>
           </a:extLst>
         </p:spPr>
@@ -6622,7 +6407,7 @@
           <a:p>
             <a:pPr algn="r"/>
             <a:fld id="{F7021451-1387-4CA6-816F-3879F97B5CBC}" type="slidenum">
-              <a:rPr b="0" lang="en-US"/>
+              <a:rPr lang="en-US" b="0"/>
               <a:t>16</a:t>
             </a:fld>
             <a:endParaRPr lang="en-US"/>
@@ -6675,7 +6460,7 @@
           <a:bodyPr wrap="square" lIns="0" tIns="0" rIns="0" bIns="0" rtlCol="0" anchor="ctr"/>
           <a:lstStyle/>
           <a:p>
-            <a:pPr indent="0" marL="0">
+            <a:pPr marL="0" indent="0">
               <a:buNone/>
             </a:pPr>
             <a:r>
@@ -6716,7 +6501,7 @@
           </a:bodyPr>
           <a:lstStyle/>
           <a:p>
-            <a:pPr indent="0" marL="0">
+            <a:pPr marL="0" indent="0">
               <a:buNone/>
             </a:pPr>
             <a:r>
@@ -6755,7 +6540,7 @@
           <a:bodyPr wrap="square" lIns="0" tIns="0" rIns="0" bIns="0" rtlCol="0" anchor="ctr"/>
           <a:lstStyle/>
           <a:p>
-            <a:pPr indent="0" marL="0">
+            <a:pPr marL="0" indent="0">
               <a:buNone/>
             </a:pPr>
             <a:r>
@@ -6799,13 +6584,20 @@
             <a:prstDash val="solid"/>
           </a:ln>
           <a:effectLst>
-            <a:outerShdw sx="100000" sy="100000" kx="0" ky="0" algn="bl" rotWithShape="0" blurRad="16510" dist="8890" dir="2700000">
+            <a:outerShdw blurRad="16510" dist="8890" dir="2700000" algn="bl" rotWithShape="0">
               <a:srgbClr val="000000">
                 <a:alpha val="12000"/>
               </a:srgbClr>
             </a:outerShdw>
           </a:effectLst>
         </p:spPr>
+        <p:txBody>
+          <a:bodyPr/>
+          <a:lstStyle/>
+          <a:p>
+            <a:endParaRPr lang="en-US"/>
+          </a:p>
+        </p:txBody>
       </p:sp>
       <p:sp>
         <p:nvSpPr>
@@ -6828,7 +6620,7 @@
           <a:bodyPr wrap="square" lIns="0" tIns="0" rIns="0" bIns="0" rtlCol="0" anchor="ctr"/>
           <a:lstStyle/>
           <a:p>
-            <a:pPr indent="0" marL="0">
+            <a:pPr marL="0" indent="0">
               <a:buNone/>
             </a:pPr>
             <a:r>
@@ -6869,7 +6661,7 @@
           </a:bodyPr>
           <a:lstStyle/>
           <a:p>
-            <a:pPr indent="0" marL="0">
+            <a:pPr marL="0" indent="0">
               <a:buNone/>
             </a:pPr>
             <a:r>
@@ -6913,13 +6705,20 @@
             <a:prstDash val="solid"/>
           </a:ln>
           <a:effectLst>
-            <a:outerShdw sx="100000" sy="100000" kx="0" ky="0" algn="bl" rotWithShape="0" blurRad="16510" dist="8890" dir="2700000">
+            <a:outerShdw blurRad="16510" dist="8890" dir="2700000" algn="bl" rotWithShape="0">
               <a:srgbClr val="000000">
                 <a:alpha val="12000"/>
               </a:srgbClr>
             </a:outerShdw>
           </a:effectLst>
         </p:spPr>
+        <p:txBody>
+          <a:bodyPr/>
+          <a:lstStyle/>
+          <a:p>
+            <a:endParaRPr lang="en-US"/>
+          </a:p>
+        </p:txBody>
       </p:sp>
       <p:sp>
         <p:nvSpPr>
@@ -6942,7 +6741,7 @@
           <a:bodyPr wrap="square" lIns="0" tIns="0" rIns="0" bIns="0" rtlCol="0" anchor="ctr"/>
           <a:lstStyle/>
           <a:p>
-            <a:pPr indent="0" marL="0">
+            <a:pPr marL="0" indent="0">
               <a:buNone/>
             </a:pPr>
             <a:r>
@@ -6983,7 +6782,7 @@
           </a:bodyPr>
           <a:lstStyle/>
           <a:p>
-            <a:pPr indent="0" marL="0">
+            <a:pPr marL="0" indent="0">
               <a:buNone/>
             </a:pPr>
             <a:r>
@@ -7027,13 +6826,20 @@
             <a:prstDash val="solid"/>
           </a:ln>
           <a:effectLst>
-            <a:outerShdw sx="100000" sy="100000" kx="0" ky="0" algn="bl" rotWithShape="0" blurRad="16510" dist="8890" dir="2700000">
+            <a:outerShdw blurRad="16510" dist="8890" dir="2700000" algn="bl" rotWithShape="0">
               <a:srgbClr val="000000">
                 <a:alpha val="12000"/>
               </a:srgbClr>
             </a:outerShdw>
           </a:effectLst>
         </p:spPr>
+        <p:txBody>
+          <a:bodyPr/>
+          <a:lstStyle/>
+          <a:p>
+            <a:endParaRPr lang="en-US"/>
+          </a:p>
+        </p:txBody>
       </p:sp>
       <p:sp>
         <p:nvSpPr>
@@ -7056,7 +6862,7 @@
           <a:bodyPr wrap="square" lIns="0" tIns="0" rIns="0" bIns="0" rtlCol="0" anchor="ctr"/>
           <a:lstStyle/>
           <a:p>
-            <a:pPr indent="0" marL="0">
+            <a:pPr marL="0" indent="0">
               <a:buNone/>
             </a:pPr>
             <a:r>
@@ -7097,7 +6903,7 @@
           </a:bodyPr>
           <a:lstStyle/>
           <a:p>
-            <a:pPr indent="0" marL="0">
+            <a:pPr marL="0" indent="0">
               <a:buNone/>
             </a:pPr>
             <a:r>
@@ -7138,7 +6944,7 @@
           </a:bodyPr>
           <a:lstStyle/>
           <a:p>
-            <a:pPr algn="ctr" indent="0" marL="0">
+            <a:pPr marL="0" indent="0" algn="ctr">
               <a:buNone/>
             </a:pPr>
             <a:r>
@@ -7182,13 +6988,20 @@
             <a:prstDash val="solid"/>
           </a:ln>
           <a:effectLst>
-            <a:outerShdw sx="100000" sy="100000" kx="0" ky="0" algn="bl" rotWithShape="0" blurRad="16510" dist="8890" dir="2700000">
+            <a:outerShdw blurRad="16510" dist="8890" dir="2700000" algn="bl" rotWithShape="0">
               <a:srgbClr val="000000">
                 <a:alpha val="12000"/>
               </a:srgbClr>
             </a:outerShdw>
           </a:effectLst>
         </p:spPr>
+        <p:txBody>
+          <a:bodyPr/>
+          <a:lstStyle/>
+          <a:p>
+            <a:endParaRPr lang="en-US"/>
+          </a:p>
+        </p:txBody>
       </p:sp>
       <p:sp>
         <p:nvSpPr>
@@ -7211,7 +7024,7 @@
           <a:bodyPr wrap="square" lIns="0" tIns="0" rIns="0" bIns="0" rtlCol="0" anchor="ctr"/>
           <a:lstStyle/>
           <a:p>
-            <a:pPr indent="0" marL="0">
+            <a:pPr marL="0" indent="0">
               <a:buNone/>
             </a:pPr>
             <a:r>
@@ -7248,11 +7061,11 @@
         </p:spPr>
         <p:txBody>
           <a:bodyPr wrap="square" lIns="0" tIns="0" rIns="0" bIns="0" rtlCol="0" anchor="ctr">
-            <a:normAutofit/>
+            <a:normAutofit lnSpcReduction="10000"/>
           </a:bodyPr>
           <a:lstStyle/>
           <a:p>
-            <a:pPr indent="0" marL="0">
+            <a:pPr marL="0" indent="0">
               <a:buNone/>
             </a:pPr>
             <a:r>
@@ -7290,7 +7103,7 @@
           </a:prstGeom>
           <a:extLst>
             <a:ext uri="{C572A759-6A51-4108-AA02-DFA0A04FC94B}">
-              <ma14:wrappingTextBoxFlag xmlns:ma14="http://schemas.microsoft.com/office/mac/drawingml/2011/main" val="0"/>
+              <ma14:wrappingTextBoxFlag xmlns:ma14="http://schemas.microsoft.com/office/mac/drawingml/2011/main" xmlns="" val="0"/>
             </a:ext>
           </a:extLst>
         </p:spPr>
@@ -7311,7 +7124,7 @@
           <a:p>
             <a:pPr algn="r"/>
             <a:fld id="{F7021451-1387-4CA6-816F-3879F97B5CBC}" type="slidenum">
-              <a:rPr b="0" lang="en-US"/>
+              <a:rPr lang="en-US" b="0"/>
               <a:t>17</a:t>
             </a:fld>
             <a:endParaRPr lang="en-US"/>
@@ -7364,7 +7177,7 @@
           <a:bodyPr wrap="square" lIns="0" tIns="0" rIns="0" bIns="0" rtlCol="0" anchor="ctr"/>
           <a:lstStyle/>
           <a:p>
-            <a:pPr indent="0" marL="0">
+            <a:pPr marL="0" indent="0">
               <a:buNone/>
             </a:pPr>
             <a:r>
@@ -7405,7 +7218,7 @@
           </a:bodyPr>
           <a:lstStyle/>
           <a:p>
-            <a:pPr indent="0" marL="0">
+            <a:pPr marL="0" indent="0">
               <a:buNone/>
             </a:pPr>
             <a:r>
@@ -7446,7 +7259,7 @@
           </a:bodyPr>
           <a:lstStyle/>
           <a:p>
-            <a:pPr indent="0" marL="0">
+            <a:pPr marL="0" indent="0">
               <a:buNone/>
             </a:pPr>
             <a:r>
@@ -7460,9 +7273,6 @@
               </a:rPr>
               <a:t>• </a:t>
             </a:r>
-            <a:pPr indent="0" marL="0">
-              <a:buNone/>
-            </a:pPr>
             <a:r>
               <a:rPr lang="en-US" sz="2000" b="1" dirty="0">
                 <a:solidFill>
@@ -7474,9 +7284,6 @@
               </a:rPr>
               <a:t>Downsampling</a:t>
             </a:r>
-            <a:pPr indent="0" marL="0">
-              <a:buNone/>
-            </a:pPr>
             <a:r>
               <a:rPr lang="en-US" sz="2000" dirty="0">
                 <a:solidFill>
@@ -7486,11 +7293,31 @@
                 <a:ea typeface="Aptos" pitchFamily="34" charset="-122"/>
                 <a:cs typeface="Aptos" pitchFamily="34" charset="-120"/>
               </a:rPr>
-              <a:t> changes the sample rate and stretches spectral copies.</a:t>
-            </a:r>
-            <a:pPr indent="0" marL="0">
-              <a:buNone/>
-            </a:pPr>
+              <a:t> changes the sample rate and stretches spectral copies.
+</a:t>
+            </a:r>
+            <a:r>
+              <a:rPr lang="en-US" sz="2000" b="1" dirty="0">
+                <a:solidFill>
+                  <a:srgbClr val="2F80A6"/>
+                </a:solidFill>
+                <a:latin typeface="Aptos" pitchFamily="34" charset="0"/>
+                <a:ea typeface="Aptos" pitchFamily="34" charset="-122"/>
+                <a:cs typeface="Aptos" pitchFamily="34" charset="-120"/>
+              </a:rPr>
+              <a:t>• </a:t>
+            </a:r>
+            <a:r>
+              <a:rPr lang="en-US" sz="2000" b="1" dirty="0">
+                <a:solidFill>
+                  <a:srgbClr val="1E293B"/>
+                </a:solidFill>
+                <a:latin typeface="Aptos" pitchFamily="34" charset="0"/>
+                <a:ea typeface="Aptos" pitchFamily="34" charset="-122"/>
+                <a:cs typeface="Aptos" pitchFamily="34" charset="-120"/>
+              </a:rPr>
+              <a:t>Aliasing</a:t>
+            </a:r>
             <a:r>
               <a:rPr lang="en-US" sz="2000" dirty="0">
                 <a:solidFill>
@@ -7500,12 +7327,9 @@
                 <a:ea typeface="Aptos" pitchFamily="34" charset="-122"/>
                 <a:cs typeface="Aptos" pitchFamily="34" charset="-120"/>
               </a:rPr>
-              <a:t>
+              <a:t> occurs when those copies overlap.
 </a:t>
             </a:r>
-            <a:pPr indent="0" marL="0">
-              <a:buNone/>
-            </a:pPr>
             <a:r>
               <a:rPr lang="en-US" sz="2000" b="1" dirty="0">
                 <a:solidFill>
@@ -7517,9 +7341,6 @@
               </a:rPr>
               <a:t>• </a:t>
             </a:r>
-            <a:pPr indent="0" marL="0">
-              <a:buNone/>
-            </a:pPr>
             <a:r>
               <a:rPr lang="en-US" sz="2000" b="1" dirty="0">
                 <a:solidFill>
@@ -7529,11 +7350,8 @@
                 <a:ea typeface="Aptos" pitchFamily="34" charset="-122"/>
                 <a:cs typeface="Aptos" pitchFamily="34" charset="-120"/>
               </a:rPr>
-              <a:t>Aliasing</a:t>
-            </a:r>
-            <a:pPr indent="0" marL="0">
-              <a:buNone/>
-            </a:pPr>
+              <a:t>Decimation</a:t>
+            </a:r>
             <a:r>
               <a:rPr lang="en-US" sz="2000" dirty="0">
                 <a:solidFill>
@@ -7543,11 +7361,31 @@
                 <a:ea typeface="Aptos" pitchFamily="34" charset="-122"/>
                 <a:cs typeface="Aptos" pitchFamily="34" charset="-120"/>
               </a:rPr>
-              <a:t> occurs when those copies overlap.</a:t>
-            </a:r>
-            <a:pPr indent="0" marL="0">
-              <a:buNone/>
-            </a:pPr>
+              <a:t> is anti-alias lowpass filtering followed by ↓M.
+</a:t>
+            </a:r>
+            <a:r>
+              <a:rPr lang="en-US" sz="2000" b="1" dirty="0">
+                <a:solidFill>
+                  <a:srgbClr val="2F80A6"/>
+                </a:solidFill>
+                <a:latin typeface="Aptos" pitchFamily="34" charset="0"/>
+                <a:ea typeface="Aptos" pitchFamily="34" charset="-122"/>
+                <a:cs typeface="Aptos" pitchFamily="34" charset="-120"/>
+              </a:rPr>
+              <a:t>• </a:t>
+            </a:r>
+            <a:r>
+              <a:rPr lang="en-US" sz="2000" b="1" dirty="0">
+                <a:solidFill>
+                  <a:srgbClr val="1E293B"/>
+                </a:solidFill>
+                <a:latin typeface="Aptos" pitchFamily="34" charset="0"/>
+                <a:ea typeface="Aptos" pitchFamily="34" charset="-122"/>
+                <a:cs typeface="Aptos" pitchFamily="34" charset="-120"/>
+              </a:rPr>
+              <a:t>Strided CNN layers</a:t>
+            </a:r>
             <a:r>
               <a:rPr lang="en-US" sz="2000" dirty="0">
                 <a:solidFill>
@@ -7557,12 +7395,9 @@
                 <a:ea typeface="Aptos" pitchFamily="34" charset="-122"/>
                 <a:cs typeface="Aptos" pitchFamily="34" charset="-120"/>
               </a:rPr>
-              <a:t>
+              <a:t> are learned-filter + downsample systems.
 </a:t>
             </a:r>
-            <a:pPr indent="0" marL="0">
-              <a:buNone/>
-            </a:pPr>
             <a:r>
               <a:rPr lang="en-US" sz="2000" b="1" dirty="0">
                 <a:solidFill>
@@ -7574,9 +7409,6 @@
               </a:rPr>
               <a:t>• </a:t>
             </a:r>
-            <a:pPr indent="0" marL="0">
-              <a:buNone/>
-            </a:pPr>
             <a:r>
               <a:rPr lang="en-US" sz="2000" b="1" dirty="0">
                 <a:solidFill>
@@ -7586,125 +7418,8 @@
                 <a:ea typeface="Aptos" pitchFamily="34" charset="-122"/>
                 <a:cs typeface="Aptos" pitchFamily="34" charset="-120"/>
               </a:rPr>
-              <a:t>Decimation</a:t>
-            </a:r>
-            <a:pPr indent="0" marL="0">
-              <a:buNone/>
-            </a:pPr>
-            <a:r>
-              <a:rPr lang="en-US" sz="2000" dirty="0">
-                <a:solidFill>
-                  <a:srgbClr val="1E293B"/>
-                </a:solidFill>
-                <a:latin typeface="Aptos" pitchFamily="34" charset="0"/>
-                <a:ea typeface="Aptos" pitchFamily="34" charset="-122"/>
-                <a:cs typeface="Aptos" pitchFamily="34" charset="-120"/>
-              </a:rPr>
-              <a:t> is anti-alias lowpass filtering followed by ↓M.</a:t>
-            </a:r>
-            <a:pPr indent="0" marL="0">
-              <a:buNone/>
-            </a:pPr>
-            <a:r>
-              <a:rPr lang="en-US" sz="2000" dirty="0">
-                <a:solidFill>
-                  <a:srgbClr val="1E293B"/>
-                </a:solidFill>
-                <a:latin typeface="Aptos" pitchFamily="34" charset="0"/>
-                <a:ea typeface="Aptos" pitchFamily="34" charset="-122"/>
-                <a:cs typeface="Aptos" pitchFamily="34" charset="-120"/>
-              </a:rPr>
-              <a:t>
-</a:t>
-            </a:r>
-            <a:pPr indent="0" marL="0">
-              <a:buNone/>
-            </a:pPr>
-            <a:r>
-              <a:rPr lang="en-US" sz="2000" b="1" dirty="0">
-                <a:solidFill>
-                  <a:srgbClr val="2F80A6"/>
-                </a:solidFill>
-                <a:latin typeface="Aptos" pitchFamily="34" charset="0"/>
-                <a:ea typeface="Aptos" pitchFamily="34" charset="-122"/>
-                <a:cs typeface="Aptos" pitchFamily="34" charset="-120"/>
-              </a:rPr>
-              <a:t>• </a:t>
-            </a:r>
-            <a:pPr indent="0" marL="0">
-              <a:buNone/>
-            </a:pPr>
-            <a:r>
-              <a:rPr lang="en-US" sz="2000" b="1" dirty="0">
-                <a:solidFill>
-                  <a:srgbClr val="1E293B"/>
-                </a:solidFill>
-                <a:latin typeface="Aptos" pitchFamily="34" charset="0"/>
-                <a:ea typeface="Aptos" pitchFamily="34" charset="-122"/>
-                <a:cs typeface="Aptos" pitchFamily="34" charset="-120"/>
-              </a:rPr>
-              <a:t>Strided CNN layers</a:t>
-            </a:r>
-            <a:pPr indent="0" marL="0">
-              <a:buNone/>
-            </a:pPr>
-            <a:r>
-              <a:rPr lang="en-US" sz="2000" dirty="0">
-                <a:solidFill>
-                  <a:srgbClr val="1E293B"/>
-                </a:solidFill>
-                <a:latin typeface="Aptos" pitchFamily="34" charset="0"/>
-                <a:ea typeface="Aptos" pitchFamily="34" charset="-122"/>
-                <a:cs typeface="Aptos" pitchFamily="34" charset="-120"/>
-              </a:rPr>
-              <a:t> are learned-filter + downsample systems.</a:t>
-            </a:r>
-            <a:pPr indent="0" marL="0">
-              <a:buNone/>
-            </a:pPr>
-            <a:r>
-              <a:rPr lang="en-US" sz="2000" dirty="0">
-                <a:solidFill>
-                  <a:srgbClr val="1E293B"/>
-                </a:solidFill>
-                <a:latin typeface="Aptos" pitchFamily="34" charset="0"/>
-                <a:ea typeface="Aptos" pitchFamily="34" charset="-122"/>
-                <a:cs typeface="Aptos" pitchFamily="34" charset="-120"/>
-              </a:rPr>
-              <a:t>
-</a:t>
-            </a:r>
-            <a:pPr indent="0" marL="0">
-              <a:buNone/>
-            </a:pPr>
-            <a:r>
-              <a:rPr lang="en-US" sz="2000" b="1" dirty="0">
-                <a:solidFill>
-                  <a:srgbClr val="2F80A6"/>
-                </a:solidFill>
-                <a:latin typeface="Aptos" pitchFamily="34" charset="0"/>
-                <a:ea typeface="Aptos" pitchFamily="34" charset="-122"/>
-                <a:cs typeface="Aptos" pitchFamily="34" charset="-120"/>
-              </a:rPr>
-              <a:t>• </a:t>
-            </a:r>
-            <a:pPr indent="0" marL="0">
-              <a:buNone/>
-            </a:pPr>
-            <a:r>
-              <a:rPr lang="en-US" sz="2000" b="1" dirty="0">
-                <a:solidFill>
-                  <a:srgbClr val="1E293B"/>
-                </a:solidFill>
-                <a:latin typeface="Aptos" pitchFamily="34" charset="0"/>
-                <a:ea typeface="Aptos" pitchFamily="34" charset="-122"/>
-                <a:cs typeface="Aptos" pitchFamily="34" charset="-120"/>
-              </a:rPr>
               <a:t>Anti-aliased CNNs</a:t>
             </a:r>
-            <a:pPr indent="0" marL="0">
-              <a:buNone/>
-            </a:pPr>
             <a:r>
               <a:rPr lang="en-US" sz="2000" dirty="0">
                 <a:solidFill>
@@ -7746,13 +7461,20 @@
             <a:prstDash val="solid"/>
           </a:ln>
           <a:effectLst>
-            <a:outerShdw sx="100000" sy="100000" kx="0" ky="0" algn="bl" rotWithShape="0" blurRad="16510" dist="8890" dir="2700000">
+            <a:outerShdw blurRad="16510" dist="8890" dir="2700000" algn="bl" rotWithShape="0">
               <a:srgbClr val="000000">
                 <a:alpha val="12000"/>
               </a:srgbClr>
             </a:outerShdw>
           </a:effectLst>
         </p:spPr>
+        <p:txBody>
+          <a:bodyPr/>
+          <a:lstStyle/>
+          <a:p>
+            <a:endParaRPr lang="en-US"/>
+          </a:p>
+        </p:txBody>
       </p:sp>
       <p:sp>
         <p:nvSpPr>
@@ -7775,7 +7497,7 @@
           <a:bodyPr wrap="square" lIns="0" tIns="0" rIns="0" bIns="0" rtlCol="0" anchor="ctr"/>
           <a:lstStyle/>
           <a:p>
-            <a:pPr indent="0" marL="0">
+            <a:pPr marL="0" indent="0">
               <a:buNone/>
             </a:pPr>
             <a:r>
@@ -7816,7 +7538,7 @@
           </a:bodyPr>
           <a:lstStyle/>
           <a:p>
-            <a:pPr indent="0" marL="0">
+            <a:pPr marL="0" indent="0">
               <a:buNone/>
             </a:pPr>
             <a:r>
@@ -7860,13 +7582,20 @@
             <a:prstDash val="solid"/>
           </a:ln>
           <a:effectLst>
-            <a:outerShdw sx="100000" sy="100000" kx="0" ky="0" algn="bl" rotWithShape="0" blurRad="16510" dist="8890" dir="2700000">
+            <a:outerShdw blurRad="16510" dist="8890" dir="2700000" algn="bl" rotWithShape="0">
               <a:srgbClr val="000000">
                 <a:alpha val="12000"/>
               </a:srgbClr>
             </a:outerShdw>
           </a:effectLst>
         </p:spPr>
+        <p:txBody>
+          <a:bodyPr/>
+          <a:lstStyle/>
+          <a:p>
+            <a:endParaRPr lang="en-US"/>
+          </a:p>
+        </p:txBody>
       </p:sp>
       <p:sp>
         <p:nvSpPr>
@@ -7889,7 +7618,7 @@
           <a:bodyPr wrap="square" lIns="0" tIns="0" rIns="0" bIns="0" rtlCol="0" anchor="ctr"/>
           <a:lstStyle/>
           <a:p>
-            <a:pPr indent="0" marL="0">
+            <a:pPr marL="0" indent="0">
               <a:buNone/>
             </a:pPr>
             <a:r>
@@ -7930,7 +7659,7 @@
           </a:bodyPr>
           <a:lstStyle/>
           <a:p>
-            <a:pPr indent="0" marL="0">
+            <a:pPr marL="0" indent="0">
               <a:buNone/>
             </a:pPr>
             <a:r>
@@ -7968,7 +7697,7 @@
           </a:prstGeom>
           <a:extLst>
             <a:ext uri="{C572A759-6A51-4108-AA02-DFA0A04FC94B}">
-              <ma14:wrappingTextBoxFlag xmlns:ma14="http://schemas.microsoft.com/office/mac/drawingml/2011/main" val="0"/>
+              <ma14:wrappingTextBoxFlag xmlns:ma14="http://schemas.microsoft.com/office/mac/drawingml/2011/main" xmlns="" val="0"/>
             </a:ext>
           </a:extLst>
         </p:spPr>
@@ -7989,7 +7718,7 @@
           <a:p>
             <a:pPr algn="r"/>
             <a:fld id="{F7021451-1387-4CA6-816F-3879F97B5CBC}" type="slidenum">
-              <a:rPr b="0" lang="en-US"/>
+              <a:rPr lang="en-US" b="0"/>
               <a:t>18</a:t>
             </a:fld>
             <a:endParaRPr lang="en-US"/>
@@ -8042,7 +7771,7 @@
           <a:bodyPr wrap="square" lIns="0" tIns="0" rIns="0" bIns="0" rtlCol="0" anchor="ctr"/>
           <a:lstStyle/>
           <a:p>
-            <a:pPr indent="0" marL="0">
+            <a:pPr marL="0" indent="0">
               <a:buNone/>
             </a:pPr>
             <a:r>
@@ -8083,7 +7812,7 @@
           </a:bodyPr>
           <a:lstStyle/>
           <a:p>
-            <a:pPr indent="0" marL="0">
+            <a:pPr marL="0" indent="0">
               <a:buNone/>
             </a:pPr>
             <a:r>
@@ -8124,7 +7853,7 @@
           </a:bodyPr>
           <a:lstStyle/>
           <a:p>
-            <a:pPr indent="0" marL="0">
+            <a:pPr marL="0" indent="0">
               <a:buNone/>
             </a:pPr>
             <a:r>
@@ -8138,9 +7867,6 @@
               </a:rPr>
               <a:t>• </a:t>
             </a:r>
-            <a:pPr indent="0" marL="0">
-              <a:buNone/>
-            </a:pPr>
             <a:r>
               <a:rPr lang="en-US" sz="1800" dirty="0">
                 <a:solidFill>
@@ -8150,11 +7876,20 @@
                 <a:ea typeface="Aptos" pitchFamily="34" charset="-122"/>
                 <a:cs typeface="Aptos" pitchFamily="34" charset="-120"/>
               </a:rPr>
-              <a:t>Oppenheim &amp; Schafer, Discrete-Time Signal Processing, §4.6: sampling-rate conversion.</a:t>
-            </a:r>
-            <a:pPr indent="0" marL="0">
-              <a:buNone/>
-            </a:pPr>
+              <a:t>Oppenheim &amp; Schafer, Discrete-Time Signal Processing, §4.6: sampling-rate conversion.
+</a:t>
+            </a:r>
+            <a:r>
+              <a:rPr lang="en-US" sz="1800" b="1" dirty="0">
+                <a:solidFill>
+                  <a:srgbClr val="2F80A6"/>
+                </a:solidFill>
+                <a:latin typeface="Aptos" pitchFamily="34" charset="0"/>
+                <a:ea typeface="Aptos" pitchFamily="34" charset="-122"/>
+                <a:cs typeface="Aptos" pitchFamily="34" charset="-120"/>
+              </a:rPr>
+              <a:t>• </a:t>
+            </a:r>
             <a:r>
               <a:rPr lang="en-US" sz="1800" dirty="0">
                 <a:solidFill>
@@ -8164,12 +7899,9 @@
                 <a:ea typeface="Aptos" pitchFamily="34" charset="-122"/>
                 <a:cs typeface="Aptos" pitchFamily="34" charset="-120"/>
               </a:rPr>
-              <a:t>
+              <a:t>Raschka et al., Machine Learning with PyTorch and Scikit-Learn: convolutional neural network architecture.
 </a:t>
             </a:r>
-            <a:pPr indent="0" marL="0">
-              <a:buNone/>
-            </a:pPr>
             <a:r>
               <a:rPr lang="en-US" sz="1800" b="1" dirty="0">
                 <a:solidFill>
@@ -8181,9 +7913,6 @@
               </a:rPr>
               <a:t>• </a:t>
             </a:r>
-            <a:pPr indent="0" marL="0">
-              <a:buNone/>
-            </a:pPr>
             <a:r>
               <a:rPr lang="en-US" sz="1800" dirty="0">
                 <a:solidFill>
@@ -8193,26 +7922,9 @@
                 <a:ea typeface="Aptos" pitchFamily="34" charset="-122"/>
                 <a:cs typeface="Aptos" pitchFamily="34" charset="-120"/>
               </a:rPr>
-              <a:t>Raschka et al., Machine Learning with PyTorch and Scikit-Learn: convolutional neural network architecture.</a:t>
-            </a:r>
-            <a:pPr indent="0" marL="0">
-              <a:buNone/>
-            </a:pPr>
-            <a:r>
-              <a:rPr lang="en-US" sz="1800" dirty="0">
-                <a:solidFill>
-                  <a:srgbClr val="1E293B"/>
-                </a:solidFill>
-                <a:latin typeface="Aptos" pitchFamily="34" charset="0"/>
-                <a:ea typeface="Aptos" pitchFamily="34" charset="-122"/>
-                <a:cs typeface="Aptos" pitchFamily="34" charset="-120"/>
-              </a:rPr>
-              <a:t>
+              <a:t>Accompanying notebook: Week6_Multirate_DSP_and_ML_Demos.ipynb.
 </a:t>
             </a:r>
-            <a:pPr indent="0" marL="0">
-              <a:buNone/>
-            </a:pPr>
             <a:r>
               <a:rPr lang="en-US" sz="1800" b="1" dirty="0">
                 <a:solidFill>
@@ -8224,52 +7936,6 @@
               </a:rPr>
               <a:t>• </a:t>
             </a:r>
-            <a:pPr indent="0" marL="0">
-              <a:buNone/>
-            </a:pPr>
-            <a:r>
-              <a:rPr lang="en-US" sz="1800" dirty="0">
-                <a:solidFill>
-                  <a:srgbClr val="1E293B"/>
-                </a:solidFill>
-                <a:latin typeface="Aptos" pitchFamily="34" charset="0"/>
-                <a:ea typeface="Aptos" pitchFamily="34" charset="-122"/>
-                <a:cs typeface="Aptos" pitchFamily="34" charset="-120"/>
-              </a:rPr>
-              <a:t>Accompanying notebook: Week6_Multirate_DSP_and_ML_Demos.ipynb.</a:t>
-            </a:r>
-            <a:pPr indent="0" marL="0">
-              <a:buNone/>
-            </a:pPr>
-            <a:r>
-              <a:rPr lang="en-US" sz="1800" dirty="0">
-                <a:solidFill>
-                  <a:srgbClr val="1E293B"/>
-                </a:solidFill>
-                <a:latin typeface="Aptos" pitchFamily="34" charset="0"/>
-                <a:ea typeface="Aptos" pitchFamily="34" charset="-122"/>
-                <a:cs typeface="Aptos" pitchFamily="34" charset="-120"/>
-              </a:rPr>
-              <a:t>
-</a:t>
-            </a:r>
-            <a:pPr indent="0" marL="0">
-              <a:buNone/>
-            </a:pPr>
-            <a:r>
-              <a:rPr lang="en-US" sz="1800" b="1" dirty="0">
-                <a:solidFill>
-                  <a:srgbClr val="2F80A6"/>
-                </a:solidFill>
-                <a:latin typeface="Aptos" pitchFamily="34" charset="0"/>
-                <a:ea typeface="Aptos" pitchFamily="34" charset="-122"/>
-                <a:cs typeface="Aptos" pitchFamily="34" charset="-120"/>
-              </a:rPr>
-              <a:t>• </a:t>
-            </a:r>
-            <a:pPr indent="0" marL="0">
-              <a:buNone/>
-            </a:pPr>
             <a:r>
               <a:rPr lang="en-US" sz="1800" dirty="0">
                 <a:solidFill>
@@ -8305,7 +7971,7 @@
           </a:prstGeom>
           <a:extLst>
             <a:ext uri="{C572A759-6A51-4108-AA02-DFA0A04FC94B}">
-              <ma14:wrappingTextBoxFlag xmlns:ma14="http://schemas.microsoft.com/office/mac/drawingml/2011/main" val="0"/>
+              <ma14:wrappingTextBoxFlag xmlns:ma14="http://schemas.microsoft.com/office/mac/drawingml/2011/main" xmlns="" val="0"/>
             </a:ext>
           </a:extLst>
         </p:spPr>
@@ -8326,7 +7992,7 @@
           <a:p>
             <a:pPr algn="r"/>
             <a:fld id="{F7021451-1387-4CA6-816F-3879F97B5CBC}" type="slidenum">
-              <a:rPr b="0" lang="en-US"/>
+              <a:rPr lang="en-US" b="0"/>
               <a:t>19</a:t>
             </a:fld>
             <a:endParaRPr lang="en-US"/>
@@ -8379,7 +8045,7 @@
           <a:bodyPr wrap="square" lIns="0" tIns="0" rIns="0" bIns="0" rtlCol="0" anchor="ctr"/>
           <a:lstStyle/>
           <a:p>
-            <a:pPr indent="0" marL="0">
+            <a:pPr marL="0" indent="0">
               <a:buNone/>
             </a:pPr>
             <a:r>
@@ -8420,7 +8086,7 @@
           </a:bodyPr>
           <a:lstStyle/>
           <a:p>
-            <a:pPr indent="0" marL="0">
+            <a:pPr marL="0" indent="0">
               <a:buNone/>
             </a:pPr>
             <a:r>
@@ -8461,7 +8127,7 @@
           </a:bodyPr>
           <a:lstStyle/>
           <a:p>
-            <a:pPr indent="0" marL="0">
+            <a:pPr marL="0" indent="0">
               <a:buNone/>
             </a:pPr>
             <a:r>
@@ -8502,7 +8168,7 @@
           </a:bodyPr>
           <a:lstStyle/>
           <a:p>
-            <a:pPr indent="0" marL="0">
+            <a:pPr marL="0" indent="0">
               <a:buNone/>
             </a:pPr>
             <a:r>
@@ -8516,9 +8182,6 @@
               </a:rPr>
               <a:t>• </a:t>
             </a:r>
-            <a:pPr indent="0" marL="0">
-              <a:buNone/>
-            </a:pPr>
             <a:r>
               <a:rPr lang="en-US" sz="1950" dirty="0">
                 <a:solidFill>
@@ -8530,9 +8193,6 @@
               </a:rPr>
               <a:t>Compute </a:t>
             </a:r>
-            <a:pPr indent="0" marL="0">
-              <a:buNone/>
-            </a:pPr>
             <a:r>
               <a:rPr lang="en-US" sz="1950" b="1" dirty="0">
                 <a:solidFill>
@@ -8544,9 +8204,6 @@
               </a:rPr>
               <a:t>downsampled sequences</a:t>
             </a:r>
-            <a:pPr indent="0" marL="0">
-              <a:buNone/>
-            </a:pPr>
             <a:r>
               <a:rPr lang="en-US" sz="1950" dirty="0">
                 <a:solidFill>
@@ -8556,11 +8213,20 @@
                 <a:ea typeface="Aptos" pitchFamily="34" charset="-122"/>
                 <a:cs typeface="Aptos" pitchFamily="34" charset="-120"/>
               </a:rPr>
-              <a:t> from x[n] and M.</a:t>
-            </a:r>
-            <a:pPr indent="0" marL="0">
-              <a:buNone/>
-            </a:pPr>
+              <a:t> from x[n] and M.
+</a:t>
+            </a:r>
+            <a:r>
+              <a:rPr lang="en-US" sz="1950" b="1" dirty="0">
+                <a:solidFill>
+                  <a:srgbClr val="2F80A6"/>
+                </a:solidFill>
+                <a:latin typeface="Aptos" pitchFamily="34" charset="0"/>
+                <a:ea typeface="Aptos" pitchFamily="34" charset="-122"/>
+                <a:cs typeface="Aptos" pitchFamily="34" charset="-120"/>
+              </a:rPr>
+              <a:t>• </a:t>
+            </a:r>
             <a:r>
               <a:rPr lang="en-US" sz="1950" dirty="0">
                 <a:solidFill>
@@ -8570,12 +8236,31 @@
                 <a:ea typeface="Aptos" pitchFamily="34" charset="-122"/>
                 <a:cs typeface="Aptos" pitchFamily="34" charset="-120"/>
               </a:rPr>
-              <a:t>
+              <a:t>Predict </a:t>
+            </a:r>
+            <a:r>
+              <a:rPr lang="en-US" sz="1950" b="1" dirty="0">
+                <a:solidFill>
+                  <a:srgbClr val="1E293B"/>
+                </a:solidFill>
+                <a:latin typeface="Aptos" pitchFamily="34" charset="0"/>
+                <a:ea typeface="Aptos" pitchFamily="34" charset="-122"/>
+                <a:cs typeface="Aptos" pitchFamily="34" charset="-120"/>
+              </a:rPr>
+              <a:t>spectral stretching and aliasing</a:t>
+            </a:r>
+            <a:r>
+              <a:rPr lang="en-US" sz="1950" dirty="0">
+                <a:solidFill>
+                  <a:srgbClr val="1E293B"/>
+                </a:solidFill>
+                <a:latin typeface="Aptos" pitchFamily="34" charset="0"/>
+                <a:ea typeface="Aptos" pitchFamily="34" charset="-122"/>
+                <a:cs typeface="Aptos" pitchFamily="34" charset="-120"/>
+              </a:rPr>
+              <a:t> using the DTFT relation.
 </a:t>
             </a:r>
-            <a:pPr indent="0" marL="0">
-              <a:buNone/>
-            </a:pPr>
             <a:r>
               <a:rPr lang="en-US" sz="1950" b="1" dirty="0">
                 <a:solidFill>
@@ -8587,9 +8272,6 @@
               </a:rPr>
               <a:t>• </a:t>
             </a:r>
-            <a:pPr indent="0" marL="0">
-              <a:buNone/>
-            </a:pPr>
             <a:r>
               <a:rPr lang="en-US" sz="1950" dirty="0">
                 <a:solidFill>
@@ -8599,11 +8281,8 @@
                 <a:ea typeface="Aptos" pitchFamily="34" charset="-122"/>
                 <a:cs typeface="Aptos" pitchFamily="34" charset="-120"/>
               </a:rPr>
-              <a:t>Predict </a:t>
-            </a:r>
-            <a:pPr indent="0" marL="0">
-              <a:buNone/>
-            </a:pPr>
+              <a:t>Design the </a:t>
+            </a:r>
             <a:r>
               <a:rPr lang="en-US" sz="1950" b="1" dirty="0">
                 <a:solidFill>
@@ -8613,11 +8292,8 @@
                 <a:ea typeface="Aptos" pitchFamily="34" charset="-122"/>
                 <a:cs typeface="Aptos" pitchFamily="34" charset="-120"/>
               </a:rPr>
-              <a:t>spectral stretching and aliasing</a:t>
-            </a:r>
-            <a:pPr indent="0" marL="0">
-              <a:buNone/>
-            </a:pPr>
+              <a:t>anti-aliasing stage</a:t>
+            </a:r>
             <a:r>
               <a:rPr lang="en-US" sz="1950" dirty="0">
                 <a:solidFill>
@@ -8627,11 +8303,20 @@
                 <a:ea typeface="Aptos" pitchFamily="34" charset="-122"/>
                 <a:cs typeface="Aptos" pitchFamily="34" charset="-120"/>
               </a:rPr>
-              <a:t> using the DTFT relation.</a:t>
-            </a:r>
-            <a:pPr indent="0" marL="0">
-              <a:buNone/>
-            </a:pPr>
+              <a:t> of a decimator.
+</a:t>
+            </a:r>
+            <a:r>
+              <a:rPr lang="en-US" sz="1950" b="1" dirty="0">
+                <a:solidFill>
+                  <a:srgbClr val="2F80A6"/>
+                </a:solidFill>
+                <a:latin typeface="Aptos" pitchFamily="34" charset="0"/>
+                <a:ea typeface="Aptos" pitchFamily="34" charset="-122"/>
+                <a:cs typeface="Aptos" pitchFamily="34" charset="-120"/>
+              </a:rPr>
+              <a:t>• </a:t>
+            </a:r>
             <a:r>
               <a:rPr lang="en-US" sz="1950" dirty="0">
                 <a:solidFill>
@@ -8641,12 +8326,31 @@
                 <a:ea typeface="Aptos" pitchFamily="34" charset="-122"/>
                 <a:cs typeface="Aptos" pitchFamily="34" charset="-120"/>
               </a:rPr>
-              <a:t>
+              <a:t>Explain why </a:t>
+            </a:r>
+            <a:r>
+              <a:rPr lang="en-US" sz="1950" b="1" dirty="0">
+                <a:solidFill>
+                  <a:srgbClr val="1E293B"/>
+                </a:solidFill>
+                <a:latin typeface="Aptos" pitchFamily="34" charset="0"/>
+                <a:ea typeface="Aptos" pitchFamily="34" charset="-122"/>
+                <a:cs typeface="Aptos" pitchFamily="34" charset="-120"/>
+              </a:rPr>
+              <a:t>stride &gt; 1</a:t>
+            </a:r>
+            <a:r>
+              <a:rPr lang="en-US" sz="1950" dirty="0">
+                <a:solidFill>
+                  <a:srgbClr val="1E293B"/>
+                </a:solidFill>
+                <a:latin typeface="Aptos" pitchFamily="34" charset="0"/>
+                <a:ea typeface="Aptos" pitchFamily="34" charset="-122"/>
+                <a:cs typeface="Aptos" pitchFamily="34" charset="-120"/>
+              </a:rPr>
+              <a:t> in a CNN is a sampling operation.
 </a:t>
             </a:r>
-            <a:pPr indent="0" marL="0">
-              <a:buNone/>
-            </a:pPr>
             <a:r>
               <a:rPr lang="en-US" sz="1950" b="1" dirty="0">
                 <a:solidFill>
@@ -8658,9 +8362,6 @@
               </a:rPr>
               <a:t>• </a:t>
             </a:r>
-            <a:pPr indent="0" marL="0">
-              <a:buNone/>
-            </a:pPr>
             <a:r>
               <a:rPr lang="en-US" sz="1950" dirty="0">
                 <a:solidFill>
@@ -8670,11 +8371,8 @@
                 <a:ea typeface="Aptos" pitchFamily="34" charset="-122"/>
                 <a:cs typeface="Aptos" pitchFamily="34" charset="-120"/>
               </a:rPr>
-              <a:t>Design the </a:t>
-            </a:r>
-            <a:pPr indent="0" marL="0">
-              <a:buNone/>
-            </a:pPr>
+              <a:t>Diagnose </a:t>
+            </a:r>
             <a:r>
               <a:rPr lang="en-US" sz="1950" b="1" dirty="0">
                 <a:solidFill>
@@ -8684,153 +8382,8 @@
                 <a:ea typeface="Aptos" pitchFamily="34" charset="-122"/>
                 <a:cs typeface="Aptos" pitchFamily="34" charset="-120"/>
               </a:rPr>
-              <a:t>anti-aliasing stage</a:t>
-            </a:r>
-            <a:pPr indent="0" marL="0">
-              <a:buNone/>
-            </a:pPr>
-            <a:r>
-              <a:rPr lang="en-US" sz="1950" dirty="0">
-                <a:solidFill>
-                  <a:srgbClr val="1E293B"/>
-                </a:solidFill>
-                <a:latin typeface="Aptos" pitchFamily="34" charset="0"/>
-                <a:ea typeface="Aptos" pitchFamily="34" charset="-122"/>
-                <a:cs typeface="Aptos" pitchFamily="34" charset="-120"/>
-              </a:rPr>
-              <a:t> of a decimator.</a:t>
-            </a:r>
-            <a:pPr indent="0" marL="0">
-              <a:buNone/>
-            </a:pPr>
-            <a:r>
-              <a:rPr lang="en-US" sz="1950" dirty="0">
-                <a:solidFill>
-                  <a:srgbClr val="1E293B"/>
-                </a:solidFill>
-                <a:latin typeface="Aptos" pitchFamily="34" charset="0"/>
-                <a:ea typeface="Aptos" pitchFamily="34" charset="-122"/>
-                <a:cs typeface="Aptos" pitchFamily="34" charset="-120"/>
-              </a:rPr>
-              <a:t>
-</a:t>
-            </a:r>
-            <a:pPr indent="0" marL="0">
-              <a:buNone/>
-            </a:pPr>
-            <a:r>
-              <a:rPr lang="en-US" sz="1950" b="1" dirty="0">
-                <a:solidFill>
-                  <a:srgbClr val="2F80A6"/>
-                </a:solidFill>
-                <a:latin typeface="Aptos" pitchFamily="34" charset="0"/>
-                <a:ea typeface="Aptos" pitchFamily="34" charset="-122"/>
-                <a:cs typeface="Aptos" pitchFamily="34" charset="-120"/>
-              </a:rPr>
-              <a:t>• </a:t>
-            </a:r>
-            <a:pPr indent="0" marL="0">
-              <a:buNone/>
-            </a:pPr>
-            <a:r>
-              <a:rPr lang="en-US" sz="1950" dirty="0">
-                <a:solidFill>
-                  <a:srgbClr val="1E293B"/>
-                </a:solidFill>
-                <a:latin typeface="Aptos" pitchFamily="34" charset="0"/>
-                <a:ea typeface="Aptos" pitchFamily="34" charset="-122"/>
-                <a:cs typeface="Aptos" pitchFamily="34" charset="-120"/>
-              </a:rPr>
-              <a:t>Explain why </a:t>
-            </a:r>
-            <a:pPr indent="0" marL="0">
-              <a:buNone/>
-            </a:pPr>
-            <a:r>
-              <a:rPr lang="en-US" sz="1950" b="1" dirty="0">
-                <a:solidFill>
-                  <a:srgbClr val="1E293B"/>
-                </a:solidFill>
-                <a:latin typeface="Aptos" pitchFamily="34" charset="0"/>
-                <a:ea typeface="Aptos" pitchFamily="34" charset="-122"/>
-                <a:cs typeface="Aptos" pitchFamily="34" charset="-120"/>
-              </a:rPr>
-              <a:t>stride &gt; 1</a:t>
-            </a:r>
-            <a:pPr indent="0" marL="0">
-              <a:buNone/>
-            </a:pPr>
-            <a:r>
-              <a:rPr lang="en-US" sz="1950" dirty="0">
-                <a:solidFill>
-                  <a:srgbClr val="1E293B"/>
-                </a:solidFill>
-                <a:latin typeface="Aptos" pitchFamily="34" charset="0"/>
-                <a:ea typeface="Aptos" pitchFamily="34" charset="-122"/>
-                <a:cs typeface="Aptos" pitchFamily="34" charset="-120"/>
-              </a:rPr>
-              <a:t> in a CNN is a sampling operation.</a:t>
-            </a:r>
-            <a:pPr indent="0" marL="0">
-              <a:buNone/>
-            </a:pPr>
-            <a:r>
-              <a:rPr lang="en-US" sz="1950" dirty="0">
-                <a:solidFill>
-                  <a:srgbClr val="1E293B"/>
-                </a:solidFill>
-                <a:latin typeface="Aptos" pitchFamily="34" charset="0"/>
-                <a:ea typeface="Aptos" pitchFamily="34" charset="-122"/>
-                <a:cs typeface="Aptos" pitchFamily="34" charset="-120"/>
-              </a:rPr>
-              <a:t>
-</a:t>
-            </a:r>
-            <a:pPr indent="0" marL="0">
-              <a:buNone/>
-            </a:pPr>
-            <a:r>
-              <a:rPr lang="en-US" sz="1950" b="1" dirty="0">
-                <a:solidFill>
-                  <a:srgbClr val="2F80A6"/>
-                </a:solidFill>
-                <a:latin typeface="Aptos" pitchFamily="34" charset="0"/>
-                <a:ea typeface="Aptos" pitchFamily="34" charset="-122"/>
-                <a:cs typeface="Aptos" pitchFamily="34" charset="-120"/>
-              </a:rPr>
-              <a:t>• </a:t>
-            </a:r>
-            <a:pPr indent="0" marL="0">
-              <a:buNone/>
-            </a:pPr>
-            <a:r>
-              <a:rPr lang="en-US" sz="1950" dirty="0">
-                <a:solidFill>
-                  <a:srgbClr val="1E293B"/>
-                </a:solidFill>
-                <a:latin typeface="Aptos" pitchFamily="34" charset="0"/>
-                <a:ea typeface="Aptos" pitchFamily="34" charset="-122"/>
-                <a:cs typeface="Aptos" pitchFamily="34" charset="-120"/>
-              </a:rPr>
-              <a:t>Diagnose </a:t>
-            </a:r>
-            <a:pPr indent="0" marL="0">
-              <a:buNone/>
-            </a:pPr>
-            <a:r>
-              <a:rPr lang="en-US" sz="1950" b="1" dirty="0">
-                <a:solidFill>
-                  <a:srgbClr val="1E293B"/>
-                </a:solidFill>
-                <a:latin typeface="Aptos" pitchFamily="34" charset="0"/>
-                <a:ea typeface="Aptos" pitchFamily="34" charset="-122"/>
-                <a:cs typeface="Aptos" pitchFamily="34" charset="-120"/>
-              </a:rPr>
               <a:t>shift-equivariance failures</a:t>
             </a:r>
-            <a:pPr indent="0" marL="0">
-              <a:buNone/>
-            </a:pPr>
             <a:r>
               <a:rPr lang="en-US" sz="1950" dirty="0">
                 <a:solidFill>
@@ -8872,13 +8425,20 @@
             <a:prstDash val="solid"/>
           </a:ln>
           <a:effectLst>
-            <a:outerShdw sx="100000" sy="100000" kx="0" ky="0" algn="bl" rotWithShape="0" blurRad="16510" dist="8890" dir="2700000">
+            <a:outerShdw blurRad="16510" dist="8890" dir="2700000" algn="bl" rotWithShape="0">
               <a:srgbClr val="000000">
                 <a:alpha val="12000"/>
               </a:srgbClr>
             </a:outerShdw>
           </a:effectLst>
         </p:spPr>
+        <p:txBody>
+          <a:bodyPr/>
+          <a:lstStyle/>
+          <a:p>
+            <a:endParaRPr lang="en-US"/>
+          </a:p>
+        </p:txBody>
       </p:sp>
       <p:sp>
         <p:nvSpPr>
@@ -8901,7 +8461,7 @@
           <a:bodyPr wrap="square" lIns="0" tIns="0" rIns="0" bIns="0" rtlCol="0" anchor="ctr"/>
           <a:lstStyle/>
           <a:p>
-            <a:pPr indent="0" marL="0">
+            <a:pPr marL="0" indent="0">
               <a:buNone/>
             </a:pPr>
             <a:r>
@@ -8942,7 +8502,7 @@
           </a:bodyPr>
           <a:lstStyle/>
           <a:p>
-            <a:pPr indent="0" marL="0">
+            <a:pPr marL="0" indent="0">
               <a:buNone/>
             </a:pPr>
             <a:r>
@@ -8959,7 +8519,7 @@
             <a:endParaRPr lang="en-US" sz="1350" dirty="0"/>
           </a:p>
           <a:p>
-            <a:pPr indent="0" marL="0">
+            <a:pPr marL="0" indent="0">
               <a:buNone/>
             </a:pPr>
             <a:r>
@@ -8976,7 +8536,7 @@
             <a:endParaRPr lang="en-US" sz="1350" dirty="0"/>
           </a:p>
           <a:p>
-            <a:pPr indent="0" marL="0">
+            <a:pPr marL="0" indent="0">
               <a:buNone/>
             </a:pPr>
             <a:r>
@@ -9020,13 +8580,20 @@
             <a:prstDash val="solid"/>
           </a:ln>
           <a:effectLst>
-            <a:outerShdw sx="100000" sy="100000" kx="0" ky="0" algn="bl" rotWithShape="0" blurRad="16510" dist="8890" dir="2700000">
+            <a:outerShdw blurRad="16510" dist="8890" dir="2700000" algn="bl" rotWithShape="0">
               <a:srgbClr val="000000">
                 <a:alpha val="12000"/>
               </a:srgbClr>
             </a:outerShdw>
           </a:effectLst>
         </p:spPr>
+        <p:txBody>
+          <a:bodyPr/>
+          <a:lstStyle/>
+          <a:p>
+            <a:endParaRPr lang="en-US"/>
+          </a:p>
+        </p:txBody>
       </p:sp>
       <p:sp>
         <p:nvSpPr>
@@ -9049,7 +8616,7 @@
           <a:bodyPr wrap="square" lIns="0" tIns="0" rIns="0" bIns="0" rtlCol="0" anchor="ctr"/>
           <a:lstStyle/>
           <a:p>
-            <a:pPr indent="0" marL="0">
+            <a:pPr marL="0" indent="0">
               <a:buNone/>
             </a:pPr>
             <a:r>
@@ -9090,7 +8657,7 @@
           </a:bodyPr>
           <a:lstStyle/>
           <a:p>
-            <a:pPr indent="0" marL="0">
+            <a:pPr marL="0" indent="0">
               <a:buNone/>
             </a:pPr>
             <a:r>
@@ -9128,7 +8695,7 @@
           </a:prstGeom>
           <a:extLst>
             <a:ext uri="{C572A759-6A51-4108-AA02-DFA0A04FC94B}">
-              <ma14:wrappingTextBoxFlag xmlns:ma14="http://schemas.microsoft.com/office/mac/drawingml/2011/main" val="0"/>
+              <ma14:wrappingTextBoxFlag xmlns:ma14="http://schemas.microsoft.com/office/mac/drawingml/2011/main" xmlns="" val="0"/>
             </a:ext>
           </a:extLst>
         </p:spPr>
@@ -9149,7 +8716,7 @@
           <a:p>
             <a:pPr algn="r"/>
             <a:fld id="{F7021451-1387-4CA6-816F-3879F97B5CBC}" type="slidenum">
-              <a:rPr b="0" lang="en-US"/>
+              <a:rPr lang="en-US" b="0"/>
               <a:t>2</a:t>
             </a:fld>
             <a:endParaRPr lang="en-US"/>
@@ -9172,6 +8739,7 @@
         <a:solidFill>
           <a:srgbClr val="16324F"/>
         </a:solidFill>
+        <a:effectLst/>
       </p:bgPr>
     </p:bg>
     <p:spTree>
@@ -9209,7 +8777,7 @@
           <a:bodyPr wrap="square" lIns="0" tIns="0" rIns="0" bIns="0" rtlCol="0" anchor="ctr"/>
           <a:lstStyle/>
           <a:p>
-            <a:pPr indent="0" marL="0">
+            <a:pPr marL="0" indent="0">
               <a:buNone/>
             </a:pPr>
             <a:r>
@@ -9250,7 +8818,7 @@
           </a:bodyPr>
           <a:lstStyle/>
           <a:p>
-            <a:pPr indent="0" marL="0">
+            <a:pPr marL="0" indent="0">
               <a:buNone/>
             </a:pPr>
             <a:r>
@@ -9291,7 +8859,7 @@
           </a:bodyPr>
           <a:lstStyle/>
           <a:p>
-            <a:pPr indent="0" marL="0">
+            <a:pPr marL="0" indent="0">
               <a:buNone/>
             </a:pPr>
             <a:r>
@@ -9355,7 +8923,7 @@
           <a:bodyPr wrap="square" lIns="0" tIns="0" rIns="0" bIns="0" rtlCol="0" anchor="ctr"/>
           <a:lstStyle/>
           <a:p>
-            <a:pPr indent="0" marL="0">
+            <a:pPr marL="0" indent="0">
               <a:buNone/>
             </a:pPr>
             <a:r>
@@ -9396,7 +8964,7 @@
           </a:bodyPr>
           <a:lstStyle/>
           <a:p>
-            <a:pPr indent="0" marL="0">
+            <a:pPr marL="0" indent="0">
               <a:buNone/>
             </a:pPr>
             <a:r>
@@ -9438,6 +9006,13 @@
             <a:prstDash val="solid"/>
           </a:ln>
         </p:spPr>
+        <p:txBody>
+          <a:bodyPr/>
+          <a:lstStyle/>
+          <a:p>
+            <a:endParaRPr lang="en-US"/>
+          </a:p>
+        </p:txBody>
       </p:sp>
       <p:sp>
         <p:nvSpPr>
@@ -9460,7 +9035,7 @@
           <a:bodyPr wrap="square" lIns="0" tIns="0" rIns="0" bIns="0" rtlCol="0" anchor="ctr"/>
           <a:lstStyle/>
           <a:p>
-            <a:pPr algn="ctr" indent="0" marL="0">
+            <a:pPr marL="0" indent="0" algn="ctr">
               <a:buNone/>
             </a:pPr>
             <a:r>
@@ -9480,17 +9055,17 @@
       </p:sp>
       <p:pic>
         <p:nvPicPr>
-          <p:cNvPr id="6" name="Image 0" descr="preencoded.png">    </p:cNvPr>
+          <p:cNvPr id="6" name="Image 0" descr="preencoded.png"/>
           <p:cNvPicPr>
             <a:picLocks noChangeAspect="1"/>
           </p:cNvPicPr>
           <p:nvPr/>
         </p:nvPicPr>
         <p:blipFill>
-          <a:blip r:embed="rId1">
+          <a:blip>
             <a:extLst>
               <a:ext uri="{96DAC541-7B7A-43D3-8B79-37D633B846F1}">
-                <asvg:svgBlip xmlns:asvg="http://schemas.microsoft.com/office/drawing/2016/SVG/main" r:embed="rId2"/>
+                <asvg:svgBlip xmlns:asvg="http://schemas.microsoft.com/office/drawing/2016/SVG/main" r:embed="rId3"/>
               </a:ext>
             </a:extLst>
           </a:blip>
@@ -9531,7 +9106,7 @@
           </a:bodyPr>
           <a:lstStyle/>
           <a:p>
-            <a:pPr indent="0" marL="0">
+            <a:pPr marL="0" indent="0">
               <a:buNone/>
             </a:pPr>
             <a:r>
@@ -9545,9 +9120,6 @@
               </a:rPr>
               <a:t>• </a:t>
             </a:r>
-            <a:pPr indent="0" marL="0">
-              <a:buNone/>
-            </a:pPr>
             <a:r>
               <a:rPr lang="en-US" sz="1800" dirty="0">
                 <a:solidFill>
@@ -9557,11 +9129,20 @@
                 <a:ea typeface="Aptos" pitchFamily="34" charset="-122"/>
                 <a:cs typeface="Aptos" pitchFamily="34" charset="-120"/>
               </a:rPr>
-              <a:t>Input sample rate: F_s.</a:t>
-            </a:r>
-            <a:pPr indent="0" marL="0">
-              <a:buNone/>
-            </a:pPr>
+              <a:t>Input sample rate: F_s.
+</a:t>
+            </a:r>
+            <a:r>
+              <a:rPr lang="en-US" sz="1800" b="1" dirty="0">
+                <a:solidFill>
+                  <a:srgbClr val="2F80A6"/>
+                </a:solidFill>
+                <a:latin typeface="Aptos" pitchFamily="34" charset="0"/>
+                <a:ea typeface="Aptos" pitchFamily="34" charset="-122"/>
+                <a:cs typeface="Aptos" pitchFamily="34" charset="-120"/>
+              </a:rPr>
+              <a:t>• </a:t>
+            </a:r>
             <a:r>
               <a:rPr lang="en-US" sz="1800" dirty="0">
                 <a:solidFill>
@@ -9571,12 +9152,9 @@
                 <a:ea typeface="Aptos" pitchFamily="34" charset="-122"/>
                 <a:cs typeface="Aptos" pitchFamily="34" charset="-120"/>
               </a:rPr>
-              <a:t>
+              <a:t>Output sample rate: F_s/M.
 </a:t>
             </a:r>
-            <a:pPr indent="0" marL="0">
-              <a:buNone/>
-            </a:pPr>
             <a:r>
               <a:rPr lang="en-US" sz="1800" b="1" dirty="0">
                 <a:solidFill>
@@ -9588,9 +9166,6 @@
               </a:rPr>
               <a:t>• </a:t>
             </a:r>
-            <a:pPr indent="0" marL="0">
-              <a:buNone/>
-            </a:pPr>
             <a:r>
               <a:rPr lang="en-US" sz="1800" dirty="0">
                 <a:solidFill>
@@ -9600,26 +9175,9 @@
                 <a:ea typeface="Aptos" pitchFamily="34" charset="-122"/>
                 <a:cs typeface="Aptos" pitchFamily="34" charset="-120"/>
               </a:rPr>
-              <a:t>Output sample rate: F_s/M.</a:t>
-            </a:r>
-            <a:pPr indent="0" marL="0">
-              <a:buNone/>
-            </a:pPr>
-            <a:r>
-              <a:rPr lang="en-US" sz="1800" dirty="0">
-                <a:solidFill>
-                  <a:srgbClr val="1E293B"/>
-                </a:solidFill>
-                <a:latin typeface="Aptos" pitchFamily="34" charset="0"/>
-                <a:ea typeface="Aptos" pitchFamily="34" charset="-122"/>
-                <a:cs typeface="Aptos" pitchFamily="34" charset="-120"/>
-              </a:rPr>
-              <a:t>
+              <a:t>No new values are computed—the operation selects a subsequence.
 </a:t>
             </a:r>
-            <a:pPr indent="0" marL="0">
-              <a:buNone/>
-            </a:pPr>
             <a:r>
               <a:rPr lang="en-US" sz="1800" b="1" dirty="0">
                 <a:solidFill>
@@ -9631,52 +9189,6 @@
               </a:rPr>
               <a:t>• </a:t>
             </a:r>
-            <a:pPr indent="0" marL="0">
-              <a:buNone/>
-            </a:pPr>
-            <a:r>
-              <a:rPr lang="en-US" sz="1800" dirty="0">
-                <a:solidFill>
-                  <a:srgbClr val="1E293B"/>
-                </a:solidFill>
-                <a:latin typeface="Aptos" pitchFamily="34" charset="0"/>
-                <a:ea typeface="Aptos" pitchFamily="34" charset="-122"/>
-                <a:cs typeface="Aptos" pitchFamily="34" charset="-120"/>
-              </a:rPr>
-              <a:t>No new values are computed—the operation selects a subsequence.</a:t>
-            </a:r>
-            <a:pPr indent="0" marL="0">
-              <a:buNone/>
-            </a:pPr>
-            <a:r>
-              <a:rPr lang="en-US" sz="1800" dirty="0">
-                <a:solidFill>
-                  <a:srgbClr val="1E293B"/>
-                </a:solidFill>
-                <a:latin typeface="Aptos" pitchFamily="34" charset="0"/>
-                <a:ea typeface="Aptos" pitchFamily="34" charset="-122"/>
-                <a:cs typeface="Aptos" pitchFamily="34" charset="-120"/>
-              </a:rPr>
-              <a:t>
-</a:t>
-            </a:r>
-            <a:pPr indent="0" marL="0">
-              <a:buNone/>
-            </a:pPr>
-            <a:r>
-              <a:rPr lang="en-US" sz="1800" b="1" dirty="0">
-                <a:solidFill>
-                  <a:srgbClr val="2F80A6"/>
-                </a:solidFill>
-                <a:latin typeface="Aptos" pitchFamily="34" charset="0"/>
-                <a:ea typeface="Aptos" pitchFamily="34" charset="-122"/>
-                <a:cs typeface="Aptos" pitchFamily="34" charset="-120"/>
-              </a:rPr>
-              <a:t>• </a:t>
-            </a:r>
-            <a:pPr indent="0" marL="0">
-              <a:buNone/>
-            </a:pPr>
             <a:r>
               <a:rPr lang="en-US" sz="1800" dirty="0">
                 <a:solidFill>
@@ -9694,14 +9206,14 @@
       </p:sp>
       <p:pic>
         <p:nvPicPr>
-          <p:cNvPr id="8" name="Image 1" descr="/mnt/data/week6_multirate/assets/downsample_time.png">    </p:cNvPr>
+          <p:cNvPr id="8" name="Image 1" descr="/mnt/data/week6_multirate/assets/downsample_time.png"/>
           <p:cNvPicPr>
             <a:picLocks noChangeAspect="1"/>
           </p:cNvPicPr>
           <p:nvPr/>
         </p:nvPicPr>
         <p:blipFill>
-          <a:blip r:embed="rId3"/>
+          <a:blip r:embed="rId4"/>
           <a:stretch>
             <a:fillRect/>
           </a:stretch>
@@ -9736,7 +9248,7 @@
           </a:prstGeom>
           <a:extLst>
             <a:ext uri="{C572A759-6A51-4108-AA02-DFA0A04FC94B}">
-              <ma14:wrappingTextBoxFlag xmlns:ma14="http://schemas.microsoft.com/office/mac/drawingml/2011/main" val="0"/>
+              <ma14:wrappingTextBoxFlag xmlns:ma14="http://schemas.microsoft.com/office/mac/drawingml/2011/main" xmlns="" val="0"/>
             </a:ext>
           </a:extLst>
         </p:spPr>
@@ -9757,7 +9269,7 @@
           <a:p>
             <a:pPr algn="r"/>
             <a:fld id="{F7021451-1387-4CA6-816F-3879F97B5CBC}" type="slidenum">
-              <a:rPr b="0" lang="en-US"/>
+              <a:rPr lang="en-US" b="0"/>
               <a:t>4</a:t>
             </a:fld>
             <a:endParaRPr lang="en-US"/>
@@ -9810,7 +9322,7 @@
           <a:bodyPr wrap="square" lIns="0" tIns="0" rIns="0" bIns="0" rtlCol="0" anchor="ctr"/>
           <a:lstStyle/>
           <a:p>
-            <a:pPr indent="0" marL="0">
+            <a:pPr marL="0" indent="0">
               <a:buNone/>
             </a:pPr>
             <a:r>
@@ -9851,7 +9363,7 @@
           </a:bodyPr>
           <a:lstStyle/>
           <a:p>
-            <a:pPr indent="0" marL="0">
+            <a:pPr marL="0" indent="0">
               <a:buNone/>
             </a:pPr>
             <a:r>
@@ -9892,7 +9404,7 @@
           </a:bodyPr>
           <a:lstStyle/>
           <a:p>
-            <a:pPr indent="0" marL="0">
+            <a:pPr marL="0" indent="0">
               <a:buNone/>
             </a:pPr>
             <a:r>
@@ -9931,7 +9443,7 @@
           <a:bodyPr wrap="square" lIns="0" tIns="0" rIns="0" bIns="0" rtlCol="0" anchor="ctr"/>
           <a:lstStyle/>
           <a:p>
-            <a:pPr algn="ctr" indent="0" marL="0">
+            <a:pPr marL="0" indent="0" algn="ctr">
               <a:buNone/>
             </a:pPr>
             <a:r>
@@ -9973,6 +9485,13 @@
             <a:prstDash val="solid"/>
           </a:ln>
         </p:spPr>
+        <p:txBody>
+          <a:bodyPr/>
+          <a:lstStyle/>
+          <a:p>
+            <a:endParaRPr lang="en-US"/>
+          </a:p>
+        </p:txBody>
       </p:sp>
       <p:sp>
         <p:nvSpPr>
@@ -9995,7 +9514,7 @@
           <a:bodyPr wrap="square" lIns="0" tIns="0" rIns="0" bIns="0" rtlCol="0" anchor="ctr"/>
           <a:lstStyle/>
           <a:p>
-            <a:pPr algn="ctr" indent="0" marL="0">
+            <a:pPr marL="0" indent="0" algn="ctr">
               <a:buNone/>
             </a:pPr>
             <a:r>
@@ -10034,7 +9553,7 @@
           <a:bodyPr wrap="square" lIns="0" tIns="0" rIns="0" bIns="0" rtlCol="0" anchor="ctr"/>
           <a:lstStyle/>
           <a:p>
-            <a:pPr algn="ctr" indent="0" marL="0">
+            <a:pPr marL="0" indent="0" algn="ctr">
               <a:buNone/>
             </a:pPr>
             <a:r>
@@ -10076,6 +9595,13 @@
             <a:prstDash val="solid"/>
           </a:ln>
         </p:spPr>
+        <p:txBody>
+          <a:bodyPr/>
+          <a:lstStyle/>
+          <a:p>
+            <a:endParaRPr lang="en-US"/>
+          </a:p>
+        </p:txBody>
       </p:sp>
       <p:sp>
         <p:nvSpPr>
@@ -10098,7 +9624,7 @@
           <a:bodyPr wrap="square" lIns="0" tIns="0" rIns="0" bIns="0" rtlCol="0" anchor="ctr"/>
           <a:lstStyle/>
           <a:p>
-            <a:pPr algn="ctr" indent="0" marL="0">
+            <a:pPr marL="0" indent="0" algn="ctr">
               <a:buNone/>
             </a:pPr>
             <a:r>
@@ -10137,7 +9663,7 @@
           <a:bodyPr wrap="square" lIns="0" tIns="0" rIns="0" bIns="0" rtlCol="0" anchor="ctr"/>
           <a:lstStyle/>
           <a:p>
-            <a:pPr algn="ctr" indent="0" marL="0">
+            <a:pPr marL="0" indent="0" algn="ctr">
               <a:buNone/>
             </a:pPr>
             <a:r>
@@ -10179,6 +9705,13 @@
             <a:prstDash val="solid"/>
           </a:ln>
         </p:spPr>
+        <p:txBody>
+          <a:bodyPr/>
+          <a:lstStyle/>
+          <a:p>
+            <a:endParaRPr lang="en-US"/>
+          </a:p>
+        </p:txBody>
       </p:sp>
       <p:sp>
         <p:nvSpPr>
@@ -10201,7 +9734,7 @@
           <a:bodyPr wrap="square" lIns="0" tIns="0" rIns="0" bIns="0" rtlCol="0" anchor="ctr"/>
           <a:lstStyle/>
           <a:p>
-            <a:pPr algn="ctr" indent="0" marL="0">
+            <a:pPr marL="0" indent="0" algn="ctr">
               <a:buNone/>
             </a:pPr>
             <a:r>
@@ -10240,7 +9773,7 @@
           <a:bodyPr wrap="square" lIns="0" tIns="0" rIns="0" bIns="0" rtlCol="0" anchor="ctr"/>
           <a:lstStyle/>
           <a:p>
-            <a:pPr algn="ctr" indent="0" marL="0">
+            <a:pPr marL="0" indent="0" algn="ctr">
               <a:buNone/>
             </a:pPr>
             <a:r>
@@ -10282,6 +9815,13 @@
             <a:prstDash val="solid"/>
           </a:ln>
         </p:spPr>
+        <p:txBody>
+          <a:bodyPr/>
+          <a:lstStyle/>
+          <a:p>
+            <a:endParaRPr lang="en-US"/>
+          </a:p>
+        </p:txBody>
       </p:sp>
       <p:sp>
         <p:nvSpPr>
@@ -10304,7 +9844,7 @@
           <a:bodyPr wrap="square" lIns="0" tIns="0" rIns="0" bIns="0" rtlCol="0" anchor="ctr"/>
           <a:lstStyle/>
           <a:p>
-            <a:pPr algn="ctr" indent="0" marL="0">
+            <a:pPr marL="0" indent="0" algn="ctr">
               <a:buNone/>
             </a:pPr>
             <a:r>
@@ -10343,7 +9883,7 @@
           <a:bodyPr wrap="square" lIns="0" tIns="0" rIns="0" bIns="0" rtlCol="0" anchor="ctr"/>
           <a:lstStyle/>
           <a:p>
-            <a:pPr algn="ctr" indent="0" marL="0">
+            <a:pPr marL="0" indent="0" algn="ctr">
               <a:buNone/>
             </a:pPr>
             <a:r>
@@ -10385,6 +9925,13 @@
             <a:prstDash val="solid"/>
           </a:ln>
         </p:spPr>
+        <p:txBody>
+          <a:bodyPr/>
+          <a:lstStyle/>
+          <a:p>
+            <a:endParaRPr lang="en-US"/>
+          </a:p>
+        </p:txBody>
       </p:sp>
       <p:sp>
         <p:nvSpPr>
@@ -10407,7 +9954,7 @@
           <a:bodyPr wrap="square" lIns="0" tIns="0" rIns="0" bIns="0" rtlCol="0" anchor="ctr"/>
           <a:lstStyle/>
           <a:p>
-            <a:pPr algn="ctr" indent="0" marL="0">
+            <a:pPr marL="0" indent="0" algn="ctr">
               <a:buNone/>
             </a:pPr>
             <a:r>
@@ -10446,7 +9993,7 @@
           <a:bodyPr wrap="square" lIns="0" tIns="0" rIns="0" bIns="0" rtlCol="0" anchor="ctr"/>
           <a:lstStyle/>
           <a:p>
-            <a:pPr algn="ctr" indent="0" marL="0">
+            <a:pPr marL="0" indent="0" algn="ctr">
               <a:buNone/>
             </a:pPr>
             <a:r>
@@ -10488,6 +10035,13 @@
             <a:prstDash val="solid"/>
           </a:ln>
         </p:spPr>
+        <p:txBody>
+          <a:bodyPr/>
+          <a:lstStyle/>
+          <a:p>
+            <a:endParaRPr lang="en-US"/>
+          </a:p>
+        </p:txBody>
       </p:sp>
       <p:sp>
         <p:nvSpPr>
@@ -10510,7 +10064,7 @@
           <a:bodyPr wrap="square" lIns="0" tIns="0" rIns="0" bIns="0" rtlCol="0" anchor="ctr"/>
           <a:lstStyle/>
           <a:p>
-            <a:pPr algn="ctr" indent="0" marL="0">
+            <a:pPr marL="0" indent="0" algn="ctr">
               <a:buNone/>
             </a:pPr>
             <a:r>
@@ -10549,7 +10103,7 @@
           <a:bodyPr wrap="square" lIns="0" tIns="0" rIns="0" bIns="0" rtlCol="0" anchor="ctr"/>
           <a:lstStyle/>
           <a:p>
-            <a:pPr algn="ctr" indent="0" marL="0">
+            <a:pPr marL="0" indent="0" algn="ctr">
               <a:buNone/>
             </a:pPr>
             <a:r>
@@ -10591,6 +10145,13 @@
             <a:prstDash val="solid"/>
           </a:ln>
         </p:spPr>
+        <p:txBody>
+          <a:bodyPr/>
+          <a:lstStyle/>
+          <a:p>
+            <a:endParaRPr lang="en-US"/>
+          </a:p>
+        </p:txBody>
       </p:sp>
       <p:sp>
         <p:nvSpPr>
@@ -10613,7 +10174,7 @@
           <a:bodyPr wrap="square" lIns="0" tIns="0" rIns="0" bIns="0" rtlCol="0" anchor="ctr"/>
           <a:lstStyle/>
           <a:p>
-            <a:pPr algn="ctr" indent="0" marL="0">
+            <a:pPr marL="0" indent="0" algn="ctr">
               <a:buNone/>
             </a:pPr>
             <a:r>
@@ -10652,7 +10213,7 @@
           <a:bodyPr wrap="square" lIns="0" tIns="0" rIns="0" bIns="0" rtlCol="0" anchor="ctr"/>
           <a:lstStyle/>
           <a:p>
-            <a:pPr algn="ctr" indent="0" marL="0">
+            <a:pPr marL="0" indent="0" algn="ctr">
               <a:buNone/>
             </a:pPr>
             <a:r>
@@ -10694,6 +10255,13 @@
             <a:prstDash val="solid"/>
           </a:ln>
         </p:spPr>
+        <p:txBody>
+          <a:bodyPr/>
+          <a:lstStyle/>
+          <a:p>
+            <a:endParaRPr lang="en-US"/>
+          </a:p>
+        </p:txBody>
       </p:sp>
       <p:sp>
         <p:nvSpPr>
@@ -10716,7 +10284,7 @@
           <a:bodyPr wrap="square" lIns="0" tIns="0" rIns="0" bIns="0" rtlCol="0" anchor="ctr"/>
           <a:lstStyle/>
           <a:p>
-            <a:pPr algn="ctr" indent="0" marL="0">
+            <a:pPr marL="0" indent="0" algn="ctr">
               <a:buNone/>
             </a:pPr>
             <a:r>
@@ -10755,7 +10323,7 @@
           <a:bodyPr wrap="square" lIns="0" tIns="0" rIns="0" bIns="0" rtlCol="0" anchor="ctr"/>
           <a:lstStyle/>
           <a:p>
-            <a:pPr algn="ctr" indent="0" marL="0">
+            <a:pPr marL="0" indent="0" algn="ctr">
               <a:buNone/>
             </a:pPr>
             <a:r>
@@ -10797,6 +10365,13 @@
             <a:prstDash val="solid"/>
           </a:ln>
         </p:spPr>
+        <p:txBody>
+          <a:bodyPr/>
+          <a:lstStyle/>
+          <a:p>
+            <a:endParaRPr lang="en-US"/>
+          </a:p>
+        </p:txBody>
       </p:sp>
       <p:sp>
         <p:nvSpPr>
@@ -10819,7 +10394,7 @@
           <a:bodyPr wrap="square" lIns="0" tIns="0" rIns="0" bIns="0" rtlCol="0" anchor="ctr"/>
           <a:lstStyle/>
           <a:p>
-            <a:pPr algn="ctr" indent="0" marL="0">
+            <a:pPr marL="0" indent="0" algn="ctr">
               <a:buNone/>
             </a:pPr>
             <a:r>
@@ -10858,7 +10433,7 @@
           <a:bodyPr wrap="square" lIns="0" tIns="0" rIns="0" bIns="0" rtlCol="0" anchor="ctr"/>
           <a:lstStyle/>
           <a:p>
-            <a:pPr algn="ctr" indent="0" marL="0">
+            <a:pPr marL="0" indent="0" algn="ctr">
               <a:buNone/>
             </a:pPr>
             <a:r>
@@ -10900,6 +10475,13 @@
             <a:prstDash val="solid"/>
           </a:ln>
         </p:spPr>
+        <p:txBody>
+          <a:bodyPr/>
+          <a:lstStyle/>
+          <a:p>
+            <a:endParaRPr lang="en-US"/>
+          </a:p>
+        </p:txBody>
       </p:sp>
       <p:sp>
         <p:nvSpPr>
@@ -10922,7 +10504,7 @@
           <a:bodyPr wrap="square" lIns="0" tIns="0" rIns="0" bIns="0" rtlCol="0" anchor="ctr"/>
           <a:lstStyle/>
           <a:p>
-            <a:pPr algn="ctr" indent="0" marL="0">
+            <a:pPr marL="0" indent="0" algn="ctr">
               <a:buNone/>
             </a:pPr>
             <a:r>
@@ -10961,7 +10543,7 @@
           <a:bodyPr wrap="square" lIns="0" tIns="0" rIns="0" bIns="0" rtlCol="0" anchor="ctr"/>
           <a:lstStyle/>
           <a:p>
-            <a:pPr indent="0" marL="0">
+            <a:pPr marL="0" indent="0">
               <a:buNone/>
             </a:pPr>
             <a:r>
@@ -11000,7 +10582,7 @@
           <a:bodyPr wrap="square" lIns="0" tIns="0" rIns="0" bIns="0" rtlCol="0" anchor="ctr"/>
           <a:lstStyle/>
           <a:p>
-            <a:pPr indent="0" marL="0">
+            <a:pPr marL="0" indent="0">
               <a:buNone/>
             </a:pPr>
             <a:r>
@@ -11044,13 +10626,20 @@
             <a:prstDash val="solid"/>
           </a:ln>
           <a:effectLst>
-            <a:outerShdw sx="100000" sy="100000" kx="0" ky="0" algn="bl" rotWithShape="0" blurRad="16510" dist="8890" dir="2700000">
+            <a:outerShdw blurRad="16510" dist="8890" dir="2700000" algn="bl" rotWithShape="0">
               <a:srgbClr val="000000">
                 <a:alpha val="12000"/>
               </a:srgbClr>
             </a:outerShdw>
           </a:effectLst>
         </p:spPr>
+        <p:txBody>
+          <a:bodyPr/>
+          <a:lstStyle/>
+          <a:p>
+            <a:endParaRPr lang="en-US"/>
+          </a:p>
+        </p:txBody>
       </p:sp>
       <p:sp>
         <p:nvSpPr>
@@ -11073,7 +10662,7 @@
           <a:bodyPr wrap="square" lIns="0" tIns="0" rIns="0" bIns="0" rtlCol="0" anchor="ctr"/>
           <a:lstStyle/>
           <a:p>
-            <a:pPr indent="0" marL="0">
+            <a:pPr marL="0" indent="0">
               <a:buNone/>
             </a:pPr>
             <a:r>
@@ -11114,7 +10703,7 @@
           </a:bodyPr>
           <a:lstStyle/>
           <a:p>
-            <a:pPr indent="0" marL="0">
+            <a:pPr marL="0" indent="0">
               <a:buNone/>
             </a:pPr>
             <a:r>
@@ -11134,7 +10723,7 @@
       </p:sp>
       <p:sp>
         <p:nvSpPr>
-          <p:cNvPr id="25" name="Slide Number Placeholder 0"/>
+          <p:cNvPr id="40" name="Slide Number Placeholder 0"/>
           <p:cNvSpPr>
             <a:spLocks noGrp="1"/>
           </p:cNvSpPr>
@@ -11152,7 +10741,7 @@
           </a:prstGeom>
           <a:extLst>
             <a:ext uri="{C572A759-6A51-4108-AA02-DFA0A04FC94B}">
-              <ma14:wrappingTextBoxFlag xmlns:ma14="http://schemas.microsoft.com/office/mac/drawingml/2011/main" val="0"/>
+              <ma14:wrappingTextBoxFlag xmlns:ma14="http://schemas.microsoft.com/office/mac/drawingml/2011/main" xmlns="" val="0"/>
             </a:ext>
           </a:extLst>
         </p:spPr>
@@ -11173,7 +10762,7 @@
           <a:p>
             <a:pPr algn="r"/>
             <a:fld id="{F7021451-1387-4CA6-816F-3879F97B5CBC}" type="slidenum">
-              <a:rPr b="0" lang="en-US"/>
+              <a:rPr lang="en-US" b="0"/>
               <a:t>5</a:t>
             </a:fld>
             <a:endParaRPr lang="en-US"/>
@@ -11226,7 +10815,7 @@
           <a:bodyPr wrap="square" lIns="0" tIns="0" rIns="0" bIns="0" rtlCol="0" anchor="ctr"/>
           <a:lstStyle/>
           <a:p>
-            <a:pPr indent="0" marL="0">
+            <a:pPr marL="0" indent="0">
               <a:buNone/>
             </a:pPr>
             <a:r>
@@ -11267,7 +10856,7 @@
           </a:bodyPr>
           <a:lstStyle/>
           <a:p>
-            <a:pPr indent="0" marL="0">
+            <a:pPr marL="0" indent="0">
               <a:buNone/>
             </a:pPr>
             <a:r>
@@ -11287,17 +10876,17 @@
       </p:sp>
       <p:pic>
         <p:nvPicPr>
-          <p:cNvPr id="4" name="Image 0" descr="preencoded.png">    </p:cNvPr>
+          <p:cNvPr id="4" name="Image 0" descr="preencoded.png"/>
           <p:cNvPicPr>
             <a:picLocks noChangeAspect="1"/>
           </p:cNvPicPr>
           <p:nvPr/>
         </p:nvPicPr>
         <p:blipFill>
-          <a:blip r:embed="rId1">
+          <a:blip>
             <a:extLst>
               <a:ext uri="{96DAC541-7B7A-43D3-8B79-37D633B846F1}">
-                <asvg:svgBlip xmlns:asvg="http://schemas.microsoft.com/office/drawing/2016/SVG/main" r:embed="rId2"/>
+                <asvg:svgBlip xmlns:asvg="http://schemas.microsoft.com/office/drawing/2016/SVG/main" r:embed="rId3"/>
               </a:ext>
             </a:extLst>
           </a:blip>
@@ -11338,7 +10927,7 @@
           </a:bodyPr>
           <a:lstStyle/>
           <a:p>
-            <a:pPr indent="0" marL="0">
+            <a:pPr marL="0" indent="0">
               <a:buNone/>
             </a:pPr>
             <a:r>
@@ -11352,9 +10941,6 @@
               </a:rPr>
               <a:t>• </a:t>
             </a:r>
-            <a:pPr indent="0" marL="0">
-              <a:buNone/>
-            </a:pPr>
             <a:r>
               <a:rPr lang="en-US" sz="1740" b="1" dirty="0">
                 <a:solidFill>
@@ -11366,9 +10952,6 @@
               </a:rPr>
               <a:t>Stretch:</a:t>
             </a:r>
-            <a:pPr indent="0" marL="0">
-              <a:buNone/>
-            </a:pPr>
             <a:r>
               <a:rPr lang="en-US" sz="1740" dirty="0">
                 <a:solidFill>
@@ -11378,11 +10961,31 @@
                 <a:ea typeface="Aptos" pitchFamily="34" charset="-122"/>
                 <a:cs typeface="Aptos" pitchFamily="34" charset="-120"/>
               </a:rPr>
-              <a:t> each input spectrum is evaluated at ω/M, so features expand by M on the output frequency axis.</a:t>
-            </a:r>
-            <a:pPr indent="0" marL="0">
-              <a:buNone/>
-            </a:pPr>
+              <a:t> each input spectrum is evaluated at ω/M, so features expand by M on the output frequency axis.
+</a:t>
+            </a:r>
+            <a:r>
+              <a:rPr lang="en-US" sz="1740" b="1" dirty="0">
+                <a:solidFill>
+                  <a:srgbClr val="2F80A6"/>
+                </a:solidFill>
+                <a:latin typeface="Aptos" pitchFamily="34" charset="0"/>
+                <a:ea typeface="Aptos" pitchFamily="34" charset="-122"/>
+                <a:cs typeface="Aptos" pitchFamily="34" charset="-120"/>
+              </a:rPr>
+              <a:t>• </a:t>
+            </a:r>
+            <a:r>
+              <a:rPr lang="en-US" sz="1740" b="1" dirty="0">
+                <a:solidFill>
+                  <a:srgbClr val="1E293B"/>
+                </a:solidFill>
+                <a:latin typeface="Aptos" pitchFamily="34" charset="0"/>
+                <a:ea typeface="Aptos" pitchFamily="34" charset="-122"/>
+                <a:cs typeface="Aptos" pitchFamily="34" charset="-120"/>
+              </a:rPr>
+              <a:t>Shift:</a:t>
+            </a:r>
             <a:r>
               <a:rPr lang="en-US" sz="1740" dirty="0">
                 <a:solidFill>
@@ -11392,12 +10995,9 @@
                 <a:ea typeface="Aptos" pitchFamily="34" charset="-122"/>
                 <a:cs typeface="Aptos" pitchFamily="34" charset="-120"/>
               </a:rPr>
-              <a:t>
+              <a:t> M periodically shifted copies appear.
 </a:t>
             </a:r>
-            <a:pPr indent="0" marL="0">
-              <a:buNone/>
-            </a:pPr>
             <a:r>
               <a:rPr lang="en-US" sz="1740" b="1" dirty="0">
                 <a:solidFill>
@@ -11409,9 +11009,6 @@
               </a:rPr>
               <a:t>• </a:t>
             </a:r>
-            <a:pPr indent="0" marL="0">
-              <a:buNone/>
-            </a:pPr>
             <a:r>
               <a:rPr lang="en-US" sz="1740" b="1" dirty="0">
                 <a:solidFill>
@@ -11421,11 +11018,8 @@
                 <a:ea typeface="Aptos" pitchFamily="34" charset="-122"/>
                 <a:cs typeface="Aptos" pitchFamily="34" charset="-120"/>
               </a:rPr>
-              <a:t>Shift:</a:t>
-            </a:r>
-            <a:pPr indent="0" marL="0">
-              <a:buNone/>
-            </a:pPr>
+              <a:t>Add:</a:t>
+            </a:r>
             <a:r>
               <a:rPr lang="en-US" sz="1740" dirty="0">
                 <a:solidFill>
@@ -11435,13 +11029,22 @@
                 <a:ea typeface="Aptos" pitchFamily="34" charset="-122"/>
                 <a:cs typeface="Aptos" pitchFamily="34" charset="-120"/>
               </a:rPr>
-              <a:t> M periodically shifted copies appear.</a:t>
-            </a:r>
-            <a:pPr indent="0" marL="0">
-              <a:buNone/>
-            </a:pPr>
-            <a:r>
-              <a:rPr lang="en-US" sz="1740" dirty="0">
+              <a:t> the copies are summed; overlap is irreversible aliasing.
+</a:t>
+            </a:r>
+            <a:r>
+              <a:rPr lang="en-US" sz="1740" b="1" dirty="0">
+                <a:solidFill>
+                  <a:srgbClr val="2F80A6"/>
+                </a:solidFill>
+                <a:latin typeface="Aptos" pitchFamily="34" charset="0"/>
+                <a:ea typeface="Aptos" pitchFamily="34" charset="-122"/>
+                <a:cs typeface="Aptos" pitchFamily="34" charset="-120"/>
+              </a:rPr>
+              <a:t>• </a:t>
+            </a:r>
+            <a:r>
+              <a:rPr lang="en-US" sz="1740" b="1" dirty="0">
                 <a:solidFill>
                   <a:srgbClr val="1E293B"/>
                 </a:solidFill>
@@ -11449,97 +11052,8 @@
                 <a:ea typeface="Aptos" pitchFamily="34" charset="-122"/>
                 <a:cs typeface="Aptos" pitchFamily="34" charset="-120"/>
               </a:rPr>
-              <a:t>
-</a:t>
-            </a:r>
-            <a:pPr indent="0" marL="0">
-              <a:buNone/>
-            </a:pPr>
-            <a:r>
-              <a:rPr lang="en-US" sz="1740" b="1" dirty="0">
-                <a:solidFill>
-                  <a:srgbClr val="2F80A6"/>
-                </a:solidFill>
-                <a:latin typeface="Aptos" pitchFamily="34" charset="0"/>
-                <a:ea typeface="Aptos" pitchFamily="34" charset="-122"/>
-                <a:cs typeface="Aptos" pitchFamily="34" charset="-120"/>
-              </a:rPr>
-              <a:t>• </a:t>
-            </a:r>
-            <a:pPr indent="0" marL="0">
-              <a:buNone/>
-            </a:pPr>
-            <a:r>
-              <a:rPr lang="en-US" sz="1740" b="1" dirty="0">
-                <a:solidFill>
-                  <a:srgbClr val="1E293B"/>
-                </a:solidFill>
-                <a:latin typeface="Aptos" pitchFamily="34" charset="0"/>
-                <a:ea typeface="Aptos" pitchFamily="34" charset="-122"/>
-                <a:cs typeface="Aptos" pitchFamily="34" charset="-120"/>
-              </a:rPr>
-              <a:t>Add:</a:t>
-            </a:r>
-            <a:pPr indent="0" marL="0">
-              <a:buNone/>
-            </a:pPr>
-            <a:r>
-              <a:rPr lang="en-US" sz="1740" dirty="0">
-                <a:solidFill>
-                  <a:srgbClr val="1E293B"/>
-                </a:solidFill>
-                <a:latin typeface="Aptos" pitchFamily="34" charset="0"/>
-                <a:ea typeface="Aptos" pitchFamily="34" charset="-122"/>
-                <a:cs typeface="Aptos" pitchFamily="34" charset="-120"/>
-              </a:rPr>
-              <a:t> the copies are summed; overlap is irreversible aliasing.</a:t>
-            </a:r>
-            <a:pPr indent="0" marL="0">
-              <a:buNone/>
-            </a:pPr>
-            <a:r>
-              <a:rPr lang="en-US" sz="1740" dirty="0">
-                <a:solidFill>
-                  <a:srgbClr val="1E293B"/>
-                </a:solidFill>
-                <a:latin typeface="Aptos" pitchFamily="34" charset="0"/>
-                <a:ea typeface="Aptos" pitchFamily="34" charset="-122"/>
-                <a:cs typeface="Aptos" pitchFamily="34" charset="-120"/>
-              </a:rPr>
-              <a:t>
-</a:t>
-            </a:r>
-            <a:pPr indent="0" marL="0">
-              <a:buNone/>
-            </a:pPr>
-            <a:r>
-              <a:rPr lang="en-US" sz="1740" b="1" dirty="0">
-                <a:solidFill>
-                  <a:srgbClr val="2F80A6"/>
-                </a:solidFill>
-                <a:latin typeface="Aptos" pitchFamily="34" charset="0"/>
-                <a:ea typeface="Aptos" pitchFamily="34" charset="-122"/>
-                <a:cs typeface="Aptos" pitchFamily="34" charset="-120"/>
-              </a:rPr>
-              <a:t>• </a:t>
-            </a:r>
-            <a:pPr indent="0" marL="0">
-              <a:buNone/>
-            </a:pPr>
-            <a:r>
-              <a:rPr lang="en-US" sz="1740" b="1" dirty="0">
-                <a:solidFill>
-                  <a:srgbClr val="1E293B"/>
-                </a:solidFill>
-                <a:latin typeface="Aptos" pitchFamily="34" charset="0"/>
-                <a:ea typeface="Aptos" pitchFamily="34" charset="-122"/>
-                <a:cs typeface="Aptos" pitchFamily="34" charset="-120"/>
-              </a:rPr>
               <a:t>Scale:</a:t>
             </a:r>
-            <a:pPr indent="0" marL="0">
-              <a:buNone/>
-            </a:pPr>
             <a:r>
               <a:rPr lang="en-US" sz="1740" dirty="0">
                 <a:solidFill>
@@ -11579,6 +11093,13 @@
             <a:prstDash val="solid"/>
           </a:ln>
         </p:spPr>
+        <p:txBody>
+          <a:bodyPr/>
+          <a:lstStyle/>
+          <a:p>
+            <a:endParaRPr lang="en-US"/>
+          </a:p>
+        </p:txBody>
       </p:sp>
       <p:sp>
         <p:nvSpPr>
@@ -11601,7 +11122,7 @@
           <a:bodyPr wrap="square" lIns="0" tIns="0" rIns="0" bIns="0" rtlCol="0" anchor="ctr"/>
           <a:lstStyle/>
           <a:p>
-            <a:pPr algn="ctr" indent="0" marL="0">
+            <a:pPr marL="0" indent="0" algn="ctr">
               <a:buNone/>
             </a:pPr>
             <a:r>
@@ -11643,6 +11164,13 @@
             <a:prstDash val="solid"/>
           </a:ln>
         </p:spPr>
+        <p:txBody>
+          <a:bodyPr/>
+          <a:lstStyle/>
+          <a:p>
+            <a:endParaRPr lang="en-US"/>
+          </a:p>
+        </p:txBody>
       </p:sp>
       <p:sp>
         <p:nvSpPr>
@@ -11665,7 +11193,7 @@
           <a:bodyPr wrap="square" lIns="0" tIns="0" rIns="0" bIns="0" rtlCol="0" anchor="ctr"/>
           <a:lstStyle/>
           <a:p>
-            <a:pPr algn="ctr" indent="0" marL="0">
+            <a:pPr marL="0" indent="0" algn="ctr">
               <a:buNone/>
             </a:pPr>
             <a:r>
@@ -11707,6 +11235,13 @@
             <a:prstDash val="solid"/>
           </a:ln>
         </p:spPr>
+        <p:txBody>
+          <a:bodyPr/>
+          <a:lstStyle/>
+          <a:p>
+            <a:endParaRPr lang="en-US"/>
+          </a:p>
+        </p:txBody>
       </p:sp>
       <p:sp>
         <p:nvSpPr>
@@ -11729,7 +11264,7 @@
           <a:bodyPr wrap="square" lIns="0" tIns="0" rIns="0" bIns="0" rtlCol="0" anchor="ctr"/>
           <a:lstStyle/>
           <a:p>
-            <a:pPr algn="ctr" indent="0" marL="0">
+            <a:pPr marL="0" indent="0" algn="ctr">
               <a:buNone/>
             </a:pPr>
             <a:r>
@@ -11773,13 +11308,20 @@
             <a:prstDash val="solid"/>
           </a:ln>
           <a:effectLst>
-            <a:outerShdw sx="100000" sy="100000" kx="0" ky="0" algn="bl" rotWithShape="0" blurRad="16510" dist="8890" dir="2700000">
+            <a:outerShdw blurRad="16510" dist="8890" dir="2700000" algn="bl" rotWithShape="0">
               <a:srgbClr val="000000">
                 <a:alpha val="12000"/>
               </a:srgbClr>
             </a:outerShdw>
           </a:effectLst>
         </p:spPr>
+        <p:txBody>
+          <a:bodyPr/>
+          <a:lstStyle/>
+          <a:p>
+            <a:endParaRPr lang="en-US"/>
+          </a:p>
+        </p:txBody>
       </p:sp>
       <p:sp>
         <p:nvSpPr>
@@ -11802,7 +11344,7 @@
           <a:bodyPr wrap="square" lIns="0" tIns="0" rIns="0" bIns="0" rtlCol="0" anchor="ctr"/>
           <a:lstStyle/>
           <a:p>
-            <a:pPr indent="0" marL="0">
+            <a:pPr marL="0" indent="0">
               <a:buNone/>
             </a:pPr>
             <a:r>
@@ -11843,7 +11385,7 @@
           </a:bodyPr>
           <a:lstStyle/>
           <a:p>
-            <a:pPr indent="0" marL="0">
+            <a:pPr marL="0" indent="0">
               <a:buNone/>
             </a:pPr>
             <a:r>
@@ -11881,7 +11423,7 @@
           </a:prstGeom>
           <a:extLst>
             <a:ext uri="{C572A759-6A51-4108-AA02-DFA0A04FC94B}">
-              <ma14:wrappingTextBoxFlag xmlns:ma14="http://schemas.microsoft.com/office/mac/drawingml/2011/main" val="0"/>
+              <ma14:wrappingTextBoxFlag xmlns:ma14="http://schemas.microsoft.com/office/mac/drawingml/2011/main" xmlns="" val="0"/>
             </a:ext>
           </a:extLst>
         </p:spPr>
@@ -11902,7 +11444,7 @@
           <a:p>
             <a:pPr algn="r"/>
             <a:fld id="{F7021451-1387-4CA6-816F-3879F97B5CBC}" type="slidenum">
-              <a:rPr b="0" lang="en-US"/>
+              <a:rPr lang="en-US" b="0"/>
               <a:t>6</a:t>
             </a:fld>
             <a:endParaRPr lang="en-US"/>
@@ -11955,7 +11497,7 @@
           <a:bodyPr wrap="square" lIns="0" tIns="0" rIns="0" bIns="0" rtlCol="0" anchor="ctr"/>
           <a:lstStyle/>
           <a:p>
-            <a:pPr indent="0" marL="0">
+            <a:pPr marL="0" indent="0">
               <a:buNone/>
             </a:pPr>
             <a:r>
@@ -11996,7 +11538,7 @@
           </a:bodyPr>
           <a:lstStyle/>
           <a:p>
-            <a:pPr indent="0" marL="0">
+            <a:pPr marL="0" indent="0">
               <a:buNone/>
             </a:pPr>
             <a:r>
@@ -12016,14 +11558,14 @@
       </p:sp>
       <p:pic>
         <p:nvPicPr>
-          <p:cNvPr id="4" name="Image 0" descr="/mnt/data/week6_multirate/assets/spectrum_aliasing.png">    </p:cNvPr>
+          <p:cNvPr id="4" name="Image 0" descr="/mnt/data/week6_multirate/assets/spectrum_aliasing.png"/>
           <p:cNvPicPr>
             <a:picLocks noChangeAspect="1"/>
           </p:cNvPicPr>
           <p:nvPr/>
         </p:nvPicPr>
         <p:blipFill>
-          <a:blip r:embed="rId1"/>
+          <a:blip r:embed="rId3"/>
           <a:stretch>
             <a:fillRect/>
           </a:stretch>
@@ -12040,14 +11582,14 @@
       </p:pic>
       <p:pic>
         <p:nvPicPr>
-          <p:cNvPr id="5" name="Image 1" descr="/mnt/data/week6_multirate/assets/spectrum_no_alias.png">    </p:cNvPr>
+          <p:cNvPr id="5" name="Image 1" descr="/mnt/data/week6_multirate/assets/spectrum_no_alias.png"/>
           <p:cNvPicPr>
             <a:picLocks noChangeAspect="1"/>
           </p:cNvPicPr>
           <p:nvPr/>
         </p:nvPicPr>
         <p:blipFill>
-          <a:blip r:embed="rId2"/>
+          <a:blip r:embed="rId4"/>
           <a:stretch>
             <a:fillRect/>
           </a:stretch>
@@ -12088,13 +11630,20 @@
             <a:prstDash val="solid"/>
           </a:ln>
           <a:effectLst>
-            <a:outerShdw sx="100000" sy="100000" kx="0" ky="0" algn="bl" rotWithShape="0" blurRad="16510" dist="8890" dir="2700000">
+            <a:outerShdw blurRad="16510" dist="8890" dir="2700000" algn="bl" rotWithShape="0">
               <a:srgbClr val="000000">
                 <a:alpha val="12000"/>
               </a:srgbClr>
             </a:outerShdw>
           </a:effectLst>
         </p:spPr>
+        <p:txBody>
+          <a:bodyPr/>
+          <a:lstStyle/>
+          <a:p>
+            <a:endParaRPr lang="en-US"/>
+          </a:p>
+        </p:txBody>
       </p:sp>
       <p:sp>
         <p:nvSpPr>
@@ -12117,7 +11666,7 @@
           <a:bodyPr wrap="square" lIns="0" tIns="0" rIns="0" bIns="0" rtlCol="0" anchor="ctr"/>
           <a:lstStyle/>
           <a:p>
-            <a:pPr indent="0" marL="0">
+            <a:pPr marL="0" indent="0">
               <a:buNone/>
             </a:pPr>
             <a:r>
@@ -12154,11 +11703,11 @@
         </p:spPr>
         <p:txBody>
           <a:bodyPr wrap="square" lIns="0" tIns="0" rIns="0" bIns="0" rtlCol="0" anchor="ctr">
-            <a:normAutofit/>
+            <a:normAutofit fontScale="62500" lnSpcReduction="20000"/>
           </a:bodyPr>
           <a:lstStyle/>
           <a:p>
-            <a:pPr indent="0" marL="0">
+            <a:pPr marL="0" indent="0">
               <a:buNone/>
             </a:pPr>
             <a:r>
@@ -12196,7 +11745,7 @@
           </a:prstGeom>
           <a:extLst>
             <a:ext uri="{C572A759-6A51-4108-AA02-DFA0A04FC94B}">
-              <ma14:wrappingTextBoxFlag xmlns:ma14="http://schemas.microsoft.com/office/mac/drawingml/2011/main" val="0"/>
+              <ma14:wrappingTextBoxFlag xmlns:ma14="http://schemas.microsoft.com/office/mac/drawingml/2011/main" xmlns="" val="0"/>
             </a:ext>
           </a:extLst>
         </p:spPr>
@@ -12217,7 +11766,7 @@
           <a:p>
             <a:pPr algn="r"/>
             <a:fld id="{F7021451-1387-4CA6-816F-3879F97B5CBC}" type="slidenum">
-              <a:rPr b="0" lang="en-US"/>
+              <a:rPr lang="en-US" b="0"/>
               <a:t>7</a:t>
             </a:fld>
             <a:endParaRPr lang="en-US"/>
@@ -12240,6 +11789,7 @@
         <a:solidFill>
           <a:srgbClr val="16324F"/>
         </a:solidFill>
+        <a:effectLst/>
       </p:bgPr>
     </p:bg>
     <p:spTree>
@@ -12277,7 +11827,7 @@
           <a:bodyPr wrap="square" lIns="0" tIns="0" rIns="0" bIns="0" rtlCol="0" anchor="ctr"/>
           <a:lstStyle/>
           <a:p>
-            <a:pPr indent="0" marL="0">
+            <a:pPr marL="0" indent="0">
               <a:buNone/>
             </a:pPr>
             <a:r>
@@ -12318,7 +11868,7 @@
           </a:bodyPr>
           <a:lstStyle/>
           <a:p>
-            <a:pPr indent="0" marL="0">
+            <a:pPr marL="0" indent="0">
               <a:buNone/>
             </a:pPr>
             <a:r>
@@ -12359,7 +11909,7 @@
           </a:bodyPr>
           <a:lstStyle/>
           <a:p>
-            <a:pPr indent="0" marL="0">
+            <a:pPr marL="0" indent="0">
               <a:buNone/>
             </a:pPr>
             <a:r>
@@ -12423,7 +11973,7 @@
           <a:bodyPr wrap="square" lIns="0" tIns="0" rIns="0" bIns="0" rtlCol="0" anchor="ctr"/>
           <a:lstStyle/>
           <a:p>
-            <a:pPr indent="0" marL="0">
+            <a:pPr marL="0" indent="0">
               <a:buNone/>
             </a:pPr>
             <a:r>
@@ -12464,7 +12014,7 @@
           </a:bodyPr>
           <a:lstStyle/>
           <a:p>
-            <a:pPr indent="0" marL="0">
+            <a:pPr marL="0" indent="0">
               <a:buNone/>
             </a:pPr>
             <a:r>
@@ -12506,6 +12056,13 @@
             <a:prstDash val="solid"/>
           </a:ln>
         </p:spPr>
+        <p:txBody>
+          <a:bodyPr/>
+          <a:lstStyle/>
+          <a:p>
+            <a:endParaRPr lang="en-US"/>
+          </a:p>
+        </p:txBody>
       </p:sp>
       <p:sp>
         <p:nvSpPr>
@@ -12530,7 +12087,7 @@
           </a:bodyPr>
           <a:lstStyle/>
           <a:p>
-            <a:pPr algn="ctr" indent="0" marL="0">
+            <a:pPr marL="0" indent="0" algn="ctr">
               <a:buNone/>
             </a:pPr>
             <a:r>
@@ -12572,6 +12129,13 @@
             <a:tailEnd type="triangle"/>
           </a:ln>
         </p:spPr>
+        <p:txBody>
+          <a:bodyPr/>
+          <a:lstStyle/>
+          <a:p>
+            <a:endParaRPr lang="en-US"/>
+          </a:p>
+        </p:txBody>
       </p:sp>
       <p:sp>
         <p:nvSpPr>
@@ -12597,6 +12161,13 @@
             <a:prstDash val="solid"/>
           </a:ln>
         </p:spPr>
+        <p:txBody>
+          <a:bodyPr/>
+          <a:lstStyle/>
+          <a:p>
+            <a:endParaRPr lang="en-US"/>
+          </a:p>
+        </p:txBody>
       </p:sp>
       <p:sp>
         <p:nvSpPr>
@@ -12621,7 +12192,7 @@
           </a:bodyPr>
           <a:lstStyle/>
           <a:p>
-            <a:pPr algn="ctr" indent="0" marL="0">
+            <a:pPr marL="0" indent="0" algn="ctr">
               <a:buNone/>
             </a:pPr>
             <a:r>
@@ -12638,7 +12209,7 @@
             <a:endParaRPr lang="en-US" sz="1600" dirty="0"/>
           </a:p>
           <a:p>
-            <a:pPr algn="ctr" indent="0" marL="0">
+            <a:pPr marL="0" indent="0" algn="ctr">
               <a:buNone/>
             </a:pPr>
             <a:r>
@@ -12680,6 +12251,13 @@
             <a:tailEnd type="triangle"/>
           </a:ln>
         </p:spPr>
+        <p:txBody>
+          <a:bodyPr/>
+          <a:lstStyle/>
+          <a:p>
+            <a:endParaRPr lang="en-US"/>
+          </a:p>
+        </p:txBody>
       </p:sp>
       <p:sp>
         <p:nvSpPr>
@@ -12705,6 +12283,13 @@
             <a:prstDash val="solid"/>
           </a:ln>
         </p:spPr>
+        <p:txBody>
+          <a:bodyPr/>
+          <a:lstStyle/>
+          <a:p>
+            <a:endParaRPr lang="en-US"/>
+          </a:p>
+        </p:txBody>
       </p:sp>
       <p:sp>
         <p:nvSpPr>
@@ -12729,7 +12314,7 @@
           </a:bodyPr>
           <a:lstStyle/>
           <a:p>
-            <a:pPr algn="ctr" indent="0" marL="0">
+            <a:pPr marL="0" indent="0" algn="ctr">
               <a:buNone/>
             </a:pPr>
             <a:r>
@@ -12771,6 +12356,13 @@
             <a:tailEnd type="triangle"/>
           </a:ln>
         </p:spPr>
+        <p:txBody>
+          <a:bodyPr/>
+          <a:lstStyle/>
+          <a:p>
+            <a:endParaRPr lang="en-US"/>
+          </a:p>
+        </p:txBody>
       </p:sp>
       <p:sp>
         <p:nvSpPr>
@@ -12796,6 +12388,13 @@
             <a:prstDash val="solid"/>
           </a:ln>
         </p:spPr>
+        <p:txBody>
+          <a:bodyPr/>
+          <a:lstStyle/>
+          <a:p>
+            <a:endParaRPr lang="en-US"/>
+          </a:p>
+        </p:txBody>
       </p:sp>
       <p:sp>
         <p:nvSpPr>
@@ -12820,7 +12419,7 @@
           </a:bodyPr>
           <a:lstStyle/>
           <a:p>
-            <a:pPr algn="ctr" indent="0" marL="0">
+            <a:pPr marL="0" indent="0" algn="ctr">
               <a:buNone/>
             </a:pPr>
             <a:r>
@@ -12864,13 +12463,20 @@
             <a:prstDash val="solid"/>
           </a:ln>
           <a:effectLst>
-            <a:outerShdw sx="100000" sy="100000" kx="0" ky="0" algn="bl" rotWithShape="0" blurRad="16510" dist="8890" dir="2700000">
+            <a:outerShdw blurRad="16510" dist="8890" dir="2700000" algn="bl" rotWithShape="0">
               <a:srgbClr val="000000">
                 <a:alpha val="12000"/>
               </a:srgbClr>
             </a:outerShdw>
           </a:effectLst>
         </p:spPr>
+        <p:txBody>
+          <a:bodyPr/>
+          <a:lstStyle/>
+          <a:p>
+            <a:endParaRPr lang="en-US"/>
+          </a:p>
+        </p:txBody>
       </p:sp>
       <p:sp>
         <p:nvSpPr>
@@ -12893,7 +12499,7 @@
           <a:bodyPr wrap="square" lIns="0" tIns="0" rIns="0" bIns="0" rtlCol="0" anchor="ctr"/>
           <a:lstStyle/>
           <a:p>
-            <a:pPr indent="0" marL="0">
+            <a:pPr marL="0" indent="0">
               <a:buNone/>
             </a:pPr>
             <a:r>
@@ -12934,7 +12540,7 @@
           </a:bodyPr>
           <a:lstStyle/>
           <a:p>
-            <a:pPr indent="0" marL="0">
+            <a:pPr marL="0" indent="0">
               <a:buNone/>
             </a:pPr>
             <a:r>
@@ -12978,13 +12584,20 @@
             <a:prstDash val="solid"/>
           </a:ln>
           <a:effectLst>
-            <a:outerShdw sx="100000" sy="100000" kx="0" ky="0" algn="bl" rotWithShape="0" blurRad="16510" dist="8890" dir="2700000">
+            <a:outerShdw blurRad="16510" dist="8890" dir="2700000" algn="bl" rotWithShape="0">
               <a:srgbClr val="000000">
                 <a:alpha val="12000"/>
               </a:srgbClr>
             </a:outerShdw>
           </a:effectLst>
         </p:spPr>
+        <p:txBody>
+          <a:bodyPr/>
+          <a:lstStyle/>
+          <a:p>
+            <a:endParaRPr lang="en-US"/>
+          </a:p>
+        </p:txBody>
       </p:sp>
       <p:sp>
         <p:nvSpPr>
@@ -13007,7 +12620,7 @@
           <a:bodyPr wrap="square" lIns="0" tIns="0" rIns="0" bIns="0" rtlCol="0" anchor="ctr"/>
           <a:lstStyle/>
           <a:p>
-            <a:pPr indent="0" marL="0">
+            <a:pPr marL="0" indent="0">
               <a:buNone/>
             </a:pPr>
             <a:r>
@@ -13048,7 +12661,7 @@
           </a:bodyPr>
           <a:lstStyle/>
           <a:p>
-            <a:pPr indent="0" marL="0">
+            <a:pPr marL="0" indent="0">
               <a:buNone/>
             </a:pPr>
             <a:r>
@@ -13092,13 +12705,20 @@
             <a:prstDash val="solid"/>
           </a:ln>
           <a:effectLst>
-            <a:outerShdw sx="100000" sy="100000" kx="0" ky="0" algn="bl" rotWithShape="0" blurRad="16510" dist="8890" dir="2700000">
+            <a:outerShdw blurRad="16510" dist="8890" dir="2700000" algn="bl" rotWithShape="0">
               <a:srgbClr val="000000">
                 <a:alpha val="12000"/>
               </a:srgbClr>
             </a:outerShdw>
           </a:effectLst>
         </p:spPr>
+        <p:txBody>
+          <a:bodyPr/>
+          <a:lstStyle/>
+          <a:p>
+            <a:endParaRPr lang="en-US"/>
+          </a:p>
+        </p:txBody>
       </p:sp>
       <p:sp>
         <p:nvSpPr>
@@ -13121,7 +12741,7 @@
           <a:bodyPr wrap="square" lIns="0" tIns="0" rIns="0" bIns="0" rtlCol="0" anchor="ctr"/>
           <a:lstStyle/>
           <a:p>
-            <a:pPr indent="0" marL="0">
+            <a:pPr marL="0" indent="0">
               <a:buNone/>
             </a:pPr>
             <a:r>
@@ -13162,7 +12782,7 @@
           </a:bodyPr>
           <a:lstStyle/>
           <a:p>
-            <a:pPr indent="0" marL="0">
+            <a:pPr marL="0" indent="0">
               <a:buNone/>
             </a:pPr>
             <a:r>
@@ -13200,7 +12820,7 @@
           </a:prstGeom>
           <a:extLst>
             <a:ext uri="{C572A759-6A51-4108-AA02-DFA0A04FC94B}">
-              <ma14:wrappingTextBoxFlag xmlns:ma14="http://schemas.microsoft.com/office/mac/drawingml/2011/main" val="0"/>
+              <ma14:wrappingTextBoxFlag xmlns:ma14="http://schemas.microsoft.com/office/mac/drawingml/2011/main" xmlns="" val="0"/>
             </a:ext>
           </a:extLst>
         </p:spPr>
@@ -13221,7 +12841,7 @@
           <a:p>
             <a:pPr algn="r"/>
             <a:fld id="{F7021451-1387-4CA6-816F-3879F97B5CBC}" type="slidenum">
-              <a:rPr b="0" lang="en-US"/>
+              <a:rPr lang="en-US" b="0"/>
               <a:t>9</a:t>
             </a:fld>
             <a:endParaRPr lang="en-US"/>
@@ -13529,4 +13149,319 @@
     </a:ext>
   </a:extLst>
 </a:theme>
+</file>
+
+<file path=ppt/theme/theme2.xml><?xml version="1.0" encoding="utf-8"?>
+<a:theme xmlns:a="http://schemas.openxmlformats.org/drawingml/2006/main" name="Office Theme">
+  <a:themeElements>
+    <a:clrScheme name="Office">
+      <a:dk1>
+        <a:sysClr val="windowText" lastClr="000000"/>
+      </a:dk1>
+      <a:lt1>
+        <a:sysClr val="window" lastClr="FFFFFF"/>
+      </a:lt1>
+      <a:dk2>
+        <a:srgbClr val="0E2841"/>
+      </a:dk2>
+      <a:lt2>
+        <a:srgbClr val="E8E8E8"/>
+      </a:lt2>
+      <a:accent1>
+        <a:srgbClr val="156082"/>
+      </a:accent1>
+      <a:accent2>
+        <a:srgbClr val="E97132"/>
+      </a:accent2>
+      <a:accent3>
+        <a:srgbClr val="196B24"/>
+      </a:accent3>
+      <a:accent4>
+        <a:srgbClr val="0F9ED5"/>
+      </a:accent4>
+      <a:accent5>
+        <a:srgbClr val="A02B93"/>
+      </a:accent5>
+      <a:accent6>
+        <a:srgbClr val="4EA72E"/>
+      </a:accent6>
+      <a:hlink>
+        <a:srgbClr val="467886"/>
+      </a:hlink>
+      <a:folHlink>
+        <a:srgbClr val="96607D"/>
+      </a:folHlink>
+    </a:clrScheme>
+    <a:fontScheme name="Office">
+      <a:majorFont>
+        <a:latin typeface="Aptos Display" panose="02110004020202020204"/>
+        <a:ea typeface=""/>
+        <a:cs typeface=""/>
+        <a:font script="Jpan" typeface="游ゴシック Light"/>
+        <a:font script="Hang" typeface="맑은 고딕"/>
+        <a:font script="Hans" typeface="等线 Light"/>
+        <a:font script="Hant" typeface="新細明體"/>
+        <a:font script="Arab" typeface="Times New Roman"/>
+        <a:font script="Hebr" typeface="Times New Roman"/>
+        <a:font script="Thai" typeface="Angsana New"/>
+        <a:font script="Ethi" typeface="Nyala"/>
+        <a:font script="Beng" typeface="Vrinda"/>
+        <a:font script="Gujr" typeface="Shruti"/>
+        <a:font script="Khmr" typeface="MoolBoran"/>
+        <a:font script="Knda" typeface="Tunga"/>
+        <a:font script="Guru" typeface="Raavi"/>
+        <a:font script="Cans" typeface="Euphemia"/>
+        <a:font script="Cher" typeface="Plantagenet Cherokee"/>
+        <a:font script="Yiii" typeface="Microsoft Yi Baiti"/>
+        <a:font script="Tibt" typeface="Microsoft Himalaya"/>
+        <a:font script="Thaa" typeface="MV Boli"/>
+        <a:font script="Deva" typeface="Mangal"/>
+        <a:font script="Telu" typeface="Gautami"/>
+        <a:font script="Taml" typeface="Latha"/>
+        <a:font script="Syrc" typeface="Estrangelo Edessa"/>
+        <a:font script="Orya" typeface="Kalinga"/>
+        <a:font script="Mlym" typeface="Kartika"/>
+        <a:font script="Laoo" typeface="DokChampa"/>
+        <a:font script="Sinh" typeface="Iskoola Pota"/>
+        <a:font script="Mong" typeface="Mongolian Baiti"/>
+        <a:font script="Viet" typeface="Times New Roman"/>
+        <a:font script="Uigh" typeface="Microsoft Uighur"/>
+        <a:font script="Geor" typeface="Sylfaen"/>
+        <a:font script="Armn" typeface="Arial"/>
+        <a:font script="Bugi" typeface="Leelawadee UI"/>
+        <a:font script="Bopo" typeface="Microsoft JhengHei"/>
+        <a:font script="Java" typeface="Javanese Text"/>
+        <a:font script="Lisu" typeface="Segoe UI"/>
+        <a:font script="Mymr" typeface="Myanmar Text"/>
+        <a:font script="Nkoo" typeface="Ebrima"/>
+        <a:font script="Olck" typeface="Nirmala UI"/>
+        <a:font script="Osma" typeface="Ebrima"/>
+        <a:font script="Phag" typeface="Phagspa"/>
+        <a:font script="Syrn" typeface="Estrangelo Edessa"/>
+        <a:font script="Syrj" typeface="Estrangelo Edessa"/>
+        <a:font script="Syre" typeface="Estrangelo Edessa"/>
+        <a:font script="Sora" typeface="Nirmala UI"/>
+        <a:font script="Tale" typeface="Microsoft Tai Le"/>
+        <a:font script="Talu" typeface="Microsoft New Tai Lue"/>
+        <a:font script="Tfng" typeface="Ebrima"/>
+      </a:majorFont>
+      <a:minorFont>
+        <a:latin typeface="Aptos" panose="02110004020202020204"/>
+        <a:ea typeface=""/>
+        <a:cs typeface=""/>
+        <a:font script="Jpan" typeface="游ゴシック"/>
+        <a:font script="Hang" typeface="맑은 고딕"/>
+        <a:font script="Hans" typeface="等线"/>
+        <a:font script="Hant" typeface="新細明體"/>
+        <a:font script="Arab" typeface="Arial"/>
+        <a:font script="Hebr" typeface="Arial"/>
+        <a:font script="Thai" typeface="Cordia New"/>
+        <a:font script="Ethi" typeface="Nyala"/>
+        <a:font script="Beng" typeface="Vrinda"/>
+        <a:font script="Gujr" typeface="Shruti"/>
+        <a:font script="Khmr" typeface="DaunPenh"/>
+        <a:font script="Knda" typeface="Tunga"/>
+        <a:font script="Guru" typeface="Raavi"/>
+        <a:font script="Cans" typeface="Euphemia"/>
+        <a:font script="Cher" typeface="Plantagenet Cherokee"/>
+        <a:font script="Yiii" typeface="Microsoft Yi Baiti"/>
+        <a:font script="Tibt" typeface="Microsoft Himalaya"/>
+        <a:font script="Thaa" typeface="MV Boli"/>
+        <a:font script="Deva" typeface="Mangal"/>
+        <a:font script="Telu" typeface="Gautami"/>
+        <a:font script="Taml" typeface="Latha"/>
+        <a:font script="Syrc" typeface="Estrangelo Edessa"/>
+        <a:font script="Orya" typeface="Kalinga"/>
+        <a:font script="Mlym" typeface="Kartika"/>
+        <a:font script="Laoo" typeface="DokChampa"/>
+        <a:font script="Sinh" typeface="Iskoola Pota"/>
+        <a:font script="Mong" typeface="Mongolian Baiti"/>
+        <a:font script="Viet" typeface="Arial"/>
+        <a:font script="Uigh" typeface="Microsoft Uighur"/>
+        <a:font script="Geor" typeface="Sylfaen"/>
+        <a:font script="Armn" typeface="Arial"/>
+        <a:font script="Bugi" typeface="Leelawadee UI"/>
+        <a:font script="Bopo" typeface="Microsoft JhengHei"/>
+        <a:font script="Java" typeface="Javanese Text"/>
+        <a:font script="Lisu" typeface="Segoe UI"/>
+        <a:font script="Mymr" typeface="Myanmar Text"/>
+        <a:font script="Nkoo" typeface="Ebrima"/>
+        <a:font script="Olck" typeface="Nirmala UI"/>
+        <a:font script="Osma" typeface="Ebrima"/>
+        <a:font script="Phag" typeface="Phagspa"/>
+        <a:font script="Syrn" typeface="Estrangelo Edessa"/>
+        <a:font script="Syrj" typeface="Estrangelo Edessa"/>
+        <a:font script="Syre" typeface="Estrangelo Edessa"/>
+        <a:font script="Sora" typeface="Nirmala UI"/>
+        <a:font script="Tale" typeface="Microsoft Tai Le"/>
+        <a:font script="Talu" typeface="Microsoft New Tai Lue"/>
+        <a:font script="Tfng" typeface="Ebrima"/>
+      </a:minorFont>
+    </a:fontScheme>
+    <a:fmtScheme name="Office">
+      <a:fillStyleLst>
+        <a:solidFill>
+          <a:schemeClr val="phClr"/>
+        </a:solidFill>
+        <a:gradFill rotWithShape="1">
+          <a:gsLst>
+            <a:gs pos="0">
+              <a:schemeClr val="phClr">
+                <a:lumMod val="110000"/>
+                <a:satMod val="105000"/>
+                <a:tint val="67000"/>
+              </a:schemeClr>
+            </a:gs>
+            <a:gs pos="50000">
+              <a:schemeClr val="phClr">
+                <a:lumMod val="105000"/>
+                <a:satMod val="103000"/>
+                <a:tint val="73000"/>
+              </a:schemeClr>
+            </a:gs>
+            <a:gs pos="100000">
+              <a:schemeClr val="phClr">
+                <a:lumMod val="105000"/>
+                <a:satMod val="109000"/>
+                <a:tint val="81000"/>
+              </a:schemeClr>
+            </a:gs>
+          </a:gsLst>
+          <a:lin ang="5400000" scaled="0"/>
+        </a:gradFill>
+        <a:gradFill rotWithShape="1">
+          <a:gsLst>
+            <a:gs pos="0">
+              <a:schemeClr val="phClr">
+                <a:satMod val="103000"/>
+                <a:lumMod val="102000"/>
+                <a:tint val="94000"/>
+              </a:schemeClr>
+            </a:gs>
+            <a:gs pos="50000">
+              <a:schemeClr val="phClr">
+                <a:satMod val="110000"/>
+                <a:lumMod val="100000"/>
+                <a:shade val="100000"/>
+              </a:schemeClr>
+            </a:gs>
+            <a:gs pos="100000">
+              <a:schemeClr val="phClr">
+                <a:lumMod val="99000"/>
+                <a:satMod val="120000"/>
+                <a:shade val="78000"/>
+              </a:schemeClr>
+            </a:gs>
+          </a:gsLst>
+          <a:lin ang="5400000" scaled="0"/>
+        </a:gradFill>
+      </a:fillStyleLst>
+      <a:lnStyleLst>
+        <a:ln w="12700" cap="flat" cmpd="sng" algn="ctr">
+          <a:solidFill>
+            <a:schemeClr val="phClr"/>
+          </a:solidFill>
+          <a:prstDash val="solid"/>
+          <a:miter lim="800000"/>
+        </a:ln>
+        <a:ln w="19050" cap="flat" cmpd="sng" algn="ctr">
+          <a:solidFill>
+            <a:schemeClr val="phClr"/>
+          </a:solidFill>
+          <a:prstDash val="solid"/>
+          <a:miter lim="800000"/>
+        </a:ln>
+        <a:ln w="25400" cap="flat" cmpd="sng" algn="ctr">
+          <a:solidFill>
+            <a:schemeClr val="phClr"/>
+          </a:solidFill>
+          <a:prstDash val="solid"/>
+          <a:miter lim="800000"/>
+        </a:ln>
+      </a:lnStyleLst>
+      <a:effectStyleLst>
+        <a:effectStyle>
+          <a:effectLst/>
+        </a:effectStyle>
+        <a:effectStyle>
+          <a:effectLst/>
+        </a:effectStyle>
+        <a:effectStyle>
+          <a:effectLst>
+            <a:outerShdw blurRad="57150" dist="19050" dir="5400000" algn="ctr" rotWithShape="0">
+              <a:srgbClr val="000000">
+                <a:alpha val="63000"/>
+              </a:srgbClr>
+            </a:outerShdw>
+          </a:effectLst>
+        </a:effectStyle>
+      </a:effectStyleLst>
+      <a:bgFillStyleLst>
+        <a:solidFill>
+          <a:schemeClr val="phClr"/>
+        </a:solidFill>
+        <a:solidFill>
+          <a:schemeClr val="phClr">
+            <a:tint val="95000"/>
+            <a:satMod val="170000"/>
+          </a:schemeClr>
+        </a:solidFill>
+        <a:gradFill rotWithShape="1">
+          <a:gsLst>
+            <a:gs pos="0">
+              <a:schemeClr val="phClr">
+                <a:tint val="93000"/>
+                <a:satMod val="150000"/>
+                <a:shade val="98000"/>
+                <a:lumMod val="102000"/>
+              </a:schemeClr>
+            </a:gs>
+            <a:gs pos="50000">
+              <a:schemeClr val="phClr">
+                <a:tint val="98000"/>
+                <a:satMod val="130000"/>
+                <a:shade val="90000"/>
+                <a:lumMod val="103000"/>
+              </a:schemeClr>
+            </a:gs>
+            <a:gs pos="100000">
+              <a:schemeClr val="phClr">
+                <a:shade val="63000"/>
+                <a:satMod val="120000"/>
+              </a:schemeClr>
+            </a:gs>
+          </a:gsLst>
+          <a:lin ang="5400000" scaled="0"/>
+        </a:gradFill>
+      </a:bgFillStyleLst>
+    </a:fmtScheme>
+  </a:themeElements>
+  <a:objectDefaults>
+    <a:lnDef>
+      <a:spPr/>
+      <a:bodyPr/>
+      <a:lstStyle/>
+      <a:style>
+        <a:lnRef idx="2">
+          <a:schemeClr val="accent1"/>
+        </a:lnRef>
+        <a:fillRef idx="0">
+          <a:schemeClr val="accent1"/>
+        </a:fillRef>
+        <a:effectRef idx="1">
+          <a:schemeClr val="accent1"/>
+        </a:effectRef>
+        <a:fontRef idx="minor">
+          <a:schemeClr val="tx1"/>
+        </a:fontRef>
+      </a:style>
+    </a:lnDef>
+  </a:objectDefaults>
+  <a:extraClrSchemeLst/>
+  <a:extLst>
+    <a:ext uri="{05A4C25C-085E-4340-85A3-A5531E510DB2}">
+      <thm15:themeFamily xmlns:thm15="http://schemas.microsoft.com/office/thememl/2012/main" name="Office Theme" id="{2E142A2C-CD16-42D6-873A-C26D2A0506FA}" vid="{1BDDFF52-6CD6-40A5-AB3C-68EB2F1E4D0A}"/>
+    </a:ext>
+  </a:extLst>
+</a:theme>
 </file>